--- a/2. dynamic occupancy/dynamic occupancy-translated-20240328.pptx
+++ b/2. dynamic occupancy/dynamic occupancy-translated-20240328.pptx
@@ -5,34 +5,34 @@
     <p:sldMasterId id="2147483648" r:id="rId1"/>
   </p:sldMasterIdLst>
   <p:notesMasterIdLst>
-    <p:notesMasterId r:id="rId4"/>
+    <p:notesMasterId r:id="rId19"/>
   </p:notesMasterIdLst>
   <p:handoutMasterIdLst>
-    <p:handoutMasterId r:id="rId21"/>
+    <p:handoutMasterId r:id="rId20"/>
   </p:handoutMasterIdLst>
   <p:sldIdLst>
-    <p:sldId id="1042" r:id="rId3"/>
-    <p:sldId id="1044" r:id="rId5"/>
-    <p:sldId id="1045" r:id="rId6"/>
-    <p:sldId id="1046" r:id="rId7"/>
-    <p:sldId id="1047" r:id="rId8"/>
-    <p:sldId id="1048" r:id="rId9"/>
-    <p:sldId id="1049" r:id="rId10"/>
-    <p:sldId id="1050" r:id="rId11"/>
-    <p:sldId id="1051" r:id="rId12"/>
-    <p:sldId id="1086" r:id="rId13"/>
-    <p:sldId id="1085" r:id="rId14"/>
-    <p:sldId id="1052" r:id="rId15"/>
-    <p:sldId id="1053" r:id="rId16"/>
-    <p:sldId id="1082" r:id="rId17"/>
-    <p:sldId id="1083" r:id="rId18"/>
-    <p:sldId id="1084" r:id="rId19"/>
-    <p:sldId id="1081" r:id="rId20"/>
+    <p:sldId id="1042" r:id="rId2"/>
+    <p:sldId id="1044" r:id="rId3"/>
+    <p:sldId id="1045" r:id="rId4"/>
+    <p:sldId id="1046" r:id="rId5"/>
+    <p:sldId id="1047" r:id="rId6"/>
+    <p:sldId id="1048" r:id="rId7"/>
+    <p:sldId id="1049" r:id="rId8"/>
+    <p:sldId id="1050" r:id="rId9"/>
+    <p:sldId id="1051" r:id="rId10"/>
+    <p:sldId id="1086" r:id="rId11"/>
+    <p:sldId id="1085" r:id="rId12"/>
+    <p:sldId id="1052" r:id="rId13"/>
+    <p:sldId id="1053" r:id="rId14"/>
+    <p:sldId id="1082" r:id="rId15"/>
+    <p:sldId id="1083" r:id="rId16"/>
+    <p:sldId id="1084" r:id="rId17"/>
+    <p:sldId id="1081" r:id="rId18"/>
   </p:sldIdLst>
   <p:sldSz cx="9144000" cy="6858000" type="screen4x3"/>
   <p:notesSz cx="6858000" cy="9144000"/>
   <p:custDataLst>
-    <p:tags r:id="rId26"/>
+    <p:tags r:id="rId21"/>
   </p:custDataLst>
   <p:defaultTextStyle>
     <a:defPPr>
@@ -132,7 +132,7 @@
   <p:extLst>
     <p:ext uri="{EFAFB233-063F-42B5-8137-9DF3F51BA10A}">
       <p15:sldGuideLst xmlns:p15="http://schemas.microsoft.com/office/powerpoint/2012/main">
-        <p15:guide id="1" orient="horz" pos="0" userDrawn="1">
+        <p15:guide id="1" orient="horz" userDrawn="1">
           <p15:clr>
             <a:srgbClr val="A4A3A4"/>
           </p15:clr>
@@ -144,6 +144,20 @@
         </p15:guide>
       </p15:sldGuideLst>
     </p:ext>
+    <p:ext uri="{2D200454-40CA-4A62-9FC3-DE9A4176ACB9}">
+      <p15:notesGuideLst xmlns:p15="http://schemas.microsoft.com/office/powerpoint/2012/main">
+        <p15:guide id="1" orient="horz" pos="2880">
+          <p15:clr>
+            <a:srgbClr val="A4A3A4"/>
+          </p15:clr>
+        </p15:guide>
+        <p15:guide id="2" pos="2160">
+          <p15:clr>
+            <a:srgbClr val="A4A3A4"/>
+          </p15:clr>
+        </p15:guide>
+      </p15:notesGuideLst>
+    </p:ext>
   </p:extLst>
 </p:presentation>
 </file>
@@ -152,6 +166,203 @@
 <p:cmAuthorLst xmlns:a="http://schemas.openxmlformats.org/drawingml/2006/main" xmlns:r="http://schemas.openxmlformats.org/officeDocument/2006/relationships" xmlns:p="http://schemas.openxmlformats.org/presentationml/2006/main">
   <p:cmAuthor id="0" name="Nick Dulvy" initials="ND" lastIdx="12" clrIdx="0"/>
 </p:cmAuthorLst>
+</file>
+
+<file path=ppt/revisionInfo.xml><?xml version="1.0" encoding="utf-8"?>
+<p1510:revInfo xmlns:a="http://schemas.openxmlformats.org/drawingml/2006/main" xmlns:r="http://schemas.openxmlformats.org/officeDocument/2006/relationships" xmlns:p1510="http://schemas.microsoft.com/office/powerpoint/2015/10/main">
+  <p1510:revLst>
+    <p1510:client id="{A9C796E0-3D59-4536-AADF-6A0512D04B14}" v="66" dt="2024-04-10T07:50:15.658"/>
+  </p1510:revLst>
+</p1510:revInfo>
+</file>
+
+<file path=ppt/changesInfos/changesInfo1.xml><?xml version="1.0" encoding="utf-8"?>
+<pc:chgInfo xmlns:a="http://schemas.openxmlformats.org/drawingml/2006/main" xmlns:r="http://schemas.openxmlformats.org/officeDocument/2006/relationships" xmlns:ac="http://schemas.microsoft.com/office/drawing/2013/main/command" xmlns:pc="http://schemas.microsoft.com/office/powerpoint/2013/main/command">
+  <pc:docChgLst>
+    <pc:chgData name="Viorel Popescu" userId="9f284cf50f70590d" providerId="LiveId" clId="{A9C796E0-3D59-4536-AADF-6A0512D04B14}"/>
+    <pc:docChg chg="custSel modSld">
+      <pc:chgData name="Viorel Popescu" userId="9f284cf50f70590d" providerId="LiveId" clId="{A9C796E0-3D59-4536-AADF-6A0512D04B14}" dt="2024-04-10T07:50:19.132" v="122" actId="14100"/>
+      <pc:docMkLst>
+        <pc:docMk/>
+      </pc:docMkLst>
+      <pc:sldChg chg="modSp mod">
+        <pc:chgData name="Viorel Popescu" userId="9f284cf50f70590d" providerId="LiveId" clId="{A9C796E0-3D59-4536-AADF-6A0512D04B14}" dt="2024-04-10T07:46:02.360" v="5" actId="27636"/>
+        <pc:sldMkLst>
+          <pc:docMk/>
+          <pc:sldMk cId="0" sldId="1042"/>
+        </pc:sldMkLst>
+        <pc:spChg chg="mod">
+          <ac:chgData name="Viorel Popescu" userId="9f284cf50f70590d" providerId="LiveId" clId="{A9C796E0-3D59-4536-AADF-6A0512D04B14}" dt="2024-04-10T07:46:02.360" v="5" actId="27636"/>
+          <ac:spMkLst>
+            <pc:docMk/>
+            <pc:sldMk cId="0" sldId="1042"/>
+            <ac:spMk id="16387" creationId="{00000000-0000-0000-0000-000000000000}"/>
+          </ac:spMkLst>
+        </pc:spChg>
+      </pc:sldChg>
+      <pc:sldChg chg="modSp mod">
+        <pc:chgData name="Viorel Popescu" userId="9f284cf50f70590d" providerId="LiveId" clId="{A9C796E0-3D59-4536-AADF-6A0512D04B14}" dt="2024-04-10T07:46:02.407" v="6" actId="27636"/>
+        <pc:sldMkLst>
+          <pc:docMk/>
+          <pc:sldMk cId="0" sldId="1044"/>
+        </pc:sldMkLst>
+        <pc:spChg chg="mod">
+          <ac:chgData name="Viorel Popescu" userId="9f284cf50f70590d" providerId="LiveId" clId="{A9C796E0-3D59-4536-AADF-6A0512D04B14}" dt="2024-04-10T07:46:02.407" v="6" actId="27636"/>
+          <ac:spMkLst>
+            <pc:docMk/>
+            <pc:sldMk cId="0" sldId="1044"/>
+            <ac:spMk id="45059" creationId="{00000000-0000-0000-0000-000000000000}"/>
+          </ac:spMkLst>
+        </pc:spChg>
+      </pc:sldChg>
+      <pc:sldChg chg="modSp mod">
+        <pc:chgData name="Viorel Popescu" userId="9f284cf50f70590d" providerId="LiveId" clId="{A9C796E0-3D59-4536-AADF-6A0512D04B14}" dt="2024-04-10T07:46:02.438" v="7" actId="27636"/>
+        <pc:sldMkLst>
+          <pc:docMk/>
+          <pc:sldMk cId="0" sldId="1045"/>
+        </pc:sldMkLst>
+        <pc:spChg chg="mod">
+          <ac:chgData name="Viorel Popescu" userId="9f284cf50f70590d" providerId="LiveId" clId="{A9C796E0-3D59-4536-AADF-6A0512D04B14}" dt="2024-04-10T07:46:02.438" v="7" actId="27636"/>
+          <ac:spMkLst>
+            <pc:docMk/>
+            <pc:sldMk cId="0" sldId="1045"/>
+            <ac:spMk id="22531" creationId="{00000000-0000-0000-0000-000000000000}"/>
+          </ac:spMkLst>
+        </pc:spChg>
+      </pc:sldChg>
+      <pc:sldChg chg="modSp mod">
+        <pc:chgData name="Viorel Popescu" userId="9f284cf50f70590d" providerId="LiveId" clId="{A9C796E0-3D59-4536-AADF-6A0512D04B14}" dt="2024-04-10T07:46:02.470" v="8" actId="27636"/>
+        <pc:sldMkLst>
+          <pc:docMk/>
+          <pc:sldMk cId="0" sldId="1046"/>
+        </pc:sldMkLst>
+        <pc:spChg chg="mod">
+          <ac:chgData name="Viorel Popescu" userId="9f284cf50f70590d" providerId="LiveId" clId="{A9C796E0-3D59-4536-AADF-6A0512D04B14}" dt="2024-04-10T07:46:02.470" v="8" actId="27636"/>
+          <ac:spMkLst>
+            <pc:docMk/>
+            <pc:sldMk cId="0" sldId="1046"/>
+            <ac:spMk id="23555" creationId="{00000000-0000-0000-0000-000000000000}"/>
+          </ac:spMkLst>
+        </pc:spChg>
+      </pc:sldChg>
+      <pc:sldChg chg="modSp mod">
+        <pc:chgData name="Viorel Popescu" userId="9f284cf50f70590d" providerId="LiveId" clId="{A9C796E0-3D59-4536-AADF-6A0512D04B14}" dt="2024-04-10T07:46:02.501" v="9" actId="27636"/>
+        <pc:sldMkLst>
+          <pc:docMk/>
+          <pc:sldMk cId="0" sldId="1047"/>
+        </pc:sldMkLst>
+        <pc:spChg chg="mod">
+          <ac:chgData name="Viorel Popescu" userId="9f284cf50f70590d" providerId="LiveId" clId="{A9C796E0-3D59-4536-AADF-6A0512D04B14}" dt="2024-04-10T07:46:02.501" v="9" actId="27636"/>
+          <ac:spMkLst>
+            <pc:docMk/>
+            <pc:sldMk cId="0" sldId="1047"/>
+            <ac:spMk id="53251" creationId="{00000000-0000-0000-0000-000000000000}"/>
+          </ac:spMkLst>
+        </pc:spChg>
+      </pc:sldChg>
+      <pc:sldChg chg="modSp mod">
+        <pc:chgData name="Viorel Popescu" userId="9f284cf50f70590d" providerId="LiveId" clId="{A9C796E0-3D59-4536-AADF-6A0512D04B14}" dt="2024-04-10T07:46:02.328" v="4" actId="27636"/>
+        <pc:sldMkLst>
+          <pc:docMk/>
+          <pc:sldMk cId="0" sldId="1081"/>
+        </pc:sldMkLst>
+        <pc:spChg chg="mod">
+          <ac:chgData name="Viorel Popescu" userId="9f284cf50f70590d" providerId="LiveId" clId="{A9C796E0-3D59-4536-AADF-6A0512D04B14}" dt="2024-04-10T07:46:02.328" v="4" actId="27636"/>
+          <ac:spMkLst>
+            <pc:docMk/>
+            <pc:sldMk cId="0" sldId="1081"/>
+            <ac:spMk id="70659" creationId="{00000000-0000-0000-0000-000000000000}"/>
+          </ac:spMkLst>
+        </pc:spChg>
+      </pc:sldChg>
+      <pc:sldChg chg="addSp delSp modSp mod">
+        <pc:chgData name="Viorel Popescu" userId="9f284cf50f70590d" providerId="LiveId" clId="{A9C796E0-3D59-4536-AADF-6A0512D04B14}" dt="2024-04-10T07:50:19.132" v="122" actId="14100"/>
+        <pc:sldMkLst>
+          <pc:docMk/>
+          <pc:sldMk cId="0" sldId="1082"/>
+        </pc:sldMkLst>
+        <pc:spChg chg="add mod">
+          <ac:chgData name="Viorel Popescu" userId="9f284cf50f70590d" providerId="LiveId" clId="{A9C796E0-3D59-4536-AADF-6A0512D04B14}" dt="2024-04-10T07:50:19.132" v="122" actId="14100"/>
+          <ac:spMkLst>
+            <pc:docMk/>
+            <pc:sldMk cId="0" sldId="1082"/>
+            <ac:spMk id="7" creationId="{00000000-0000-0000-0000-000000000000}"/>
+          </ac:spMkLst>
+        </pc:spChg>
+        <pc:graphicFrameChg chg="del mod replId">
+          <ac:chgData name="Viorel Popescu" userId="9f284cf50f70590d" providerId="LiveId" clId="{A9C796E0-3D59-4536-AADF-6A0512D04B14}" dt="2024-04-10T07:49:59.392" v="119"/>
+          <ac:graphicFrameMkLst>
+            <pc:docMk/>
+            <pc:sldMk cId="0" sldId="1082"/>
+            <ac:graphicFrameMk id="2" creationId="{00000000-0000-0000-0000-000000000000}"/>
+          </ac:graphicFrameMkLst>
+        </pc:graphicFrameChg>
+      </pc:sldChg>
+      <pc:sldChg chg="addSp delSp modSp mod">
+        <pc:chgData name="Viorel Popescu" userId="9f284cf50f70590d" providerId="LiveId" clId="{A9C796E0-3D59-4536-AADF-6A0512D04B14}" dt="2024-04-10T07:49:46.875" v="117" actId="207"/>
+        <pc:sldMkLst>
+          <pc:docMk/>
+          <pc:sldMk cId="0" sldId="1083"/>
+        </pc:sldMkLst>
+        <pc:spChg chg="mod">
+          <ac:chgData name="Viorel Popescu" userId="9f284cf50f70590d" providerId="LiveId" clId="{A9C796E0-3D59-4536-AADF-6A0512D04B14}" dt="2024-04-10T07:49:41.461" v="116" actId="207"/>
+          <ac:spMkLst>
+            <pc:docMk/>
+            <pc:sldMk cId="0" sldId="1083"/>
+            <ac:spMk id="6" creationId="{00000000-0000-0000-0000-000000000000}"/>
+          </ac:spMkLst>
+        </pc:spChg>
+        <pc:spChg chg="add mod">
+          <ac:chgData name="Viorel Popescu" userId="9f284cf50f70590d" providerId="LiveId" clId="{A9C796E0-3D59-4536-AADF-6A0512D04B14}" dt="2024-04-10T07:49:46.875" v="117" actId="207"/>
+          <ac:spMkLst>
+            <pc:docMk/>
+            <pc:sldMk cId="0" sldId="1083"/>
+            <ac:spMk id="90116" creationId="{00000000-0000-0000-0000-000000000000}"/>
+          </ac:spMkLst>
+        </pc:spChg>
+        <pc:graphicFrameChg chg="del mod replId">
+          <ac:chgData name="Viorel Popescu" userId="9f284cf50f70590d" providerId="LiveId" clId="{A9C796E0-3D59-4536-AADF-6A0512D04B14}" dt="2024-04-10T07:48:21.497" v="49"/>
+          <ac:graphicFrameMkLst>
+            <pc:docMk/>
+            <pc:sldMk cId="0" sldId="1083"/>
+            <ac:graphicFrameMk id="2" creationId="{00000000-0000-0000-0000-000000000000}"/>
+          </ac:graphicFrameMkLst>
+        </pc:graphicFrameChg>
+      </pc:sldChg>
+      <pc:sldChg chg="addSp delSp modSp mod">
+        <pc:chgData name="Viorel Popescu" userId="9f284cf50f70590d" providerId="LiveId" clId="{A9C796E0-3D59-4536-AADF-6A0512D04B14}" dt="2024-04-10T07:48:07.066" v="47" actId="207"/>
+        <pc:sldMkLst>
+          <pc:docMk/>
+          <pc:sldMk cId="0" sldId="1084"/>
+        </pc:sldMkLst>
+        <pc:spChg chg="add mod">
+          <ac:chgData name="Viorel Popescu" userId="9f284cf50f70590d" providerId="LiveId" clId="{A9C796E0-3D59-4536-AADF-6A0512D04B14}" dt="2024-04-10T07:47:59.214" v="45" actId="207"/>
+          <ac:spMkLst>
+            <pc:docMk/>
+            <pc:sldMk cId="0" sldId="1084"/>
+            <ac:spMk id="2" creationId="{00000000-0000-0000-0000-000000000000}"/>
+          </ac:spMkLst>
+        </pc:spChg>
+        <pc:spChg chg="mod">
+          <ac:chgData name="Viorel Popescu" userId="9f284cf50f70590d" providerId="LiveId" clId="{A9C796E0-3D59-4536-AADF-6A0512D04B14}" dt="2024-04-10T07:48:07.066" v="47" actId="207"/>
+          <ac:spMkLst>
+            <pc:docMk/>
+            <pc:sldMk cId="0" sldId="1084"/>
+            <ac:spMk id="8" creationId="{00000000-0000-0000-0000-000000000000}"/>
+          </ac:spMkLst>
+        </pc:spChg>
+        <pc:graphicFrameChg chg="del mod replId">
+          <ac:chgData name="Viorel Popescu" userId="9f284cf50f70590d" providerId="LiveId" clId="{A9C796E0-3D59-4536-AADF-6A0512D04B14}" dt="2024-04-10T07:45:55.544" v="1"/>
+          <ac:graphicFrameMkLst>
+            <pc:docMk/>
+            <pc:sldMk cId="0" sldId="1084"/>
+            <ac:graphicFrameMk id="3" creationId="{00000000-0000-0000-0000-000000000000}"/>
+          </ac:graphicFrameMkLst>
+        </pc:graphicFrameChg>
+      </pc:sldChg>
+    </pc:docChg>
+  </pc:docChgLst>
+</pc:chgInfo>
 </file>
 
 <file path=ppt/handoutMasters/handoutMaster1.xml><?xml version="1.0" encoding="utf-8"?>
@@ -236,6 +447,7 @@
           <a:p>
             <a:fld id="{BF32BA1C-DB3A-774D-BF63-C74147DF77EA}" type="datetimeFigureOut">
               <a:rPr lang="en-US" smtClean="0"/>
+              <a:t>4/10/2024</a:t>
             </a:fld>
             <a:endParaRPr lang="en-US"/>
           </a:p>
@@ -301,12 +513,18 @@
           <a:p>
             <a:fld id="{BFE6B3A4-733A-9E48-9D0C-CC9BA8AFA5AB}" type="slidenum">
               <a:rPr lang="en-US" smtClean="0"/>
+              <a:t>‹#›</a:t>
             </a:fld>
             <a:endParaRPr lang="en-US"/>
           </a:p>
         </p:txBody>
       </p:sp>
     </p:spTree>
+    <p:extLst>
+      <p:ext uri="{BB962C8B-B14F-4D97-AF65-F5344CB8AC3E}">
+        <p14:creationId xmlns:p14="http://schemas.microsoft.com/office/powerpoint/2010/main" val="1"/>
+      </p:ext>
+    </p:extLst>
   </p:cSld>
   <p:clrMap bg1="lt1" tx1="dk1" bg2="lt2" tx2="dk2" accent1="accent1" accent2="accent2" accent3="accent3" accent4="accent4" accent5="accent5" accent6="accent6" hlink="hlink" folHlink="folHlink"/>
   <p:hf hdr="0" ftr="0" dt="0"/>
@@ -395,6 +613,7 @@
           <a:p>
             <a:fld id="{960A4FFD-2244-BD43-ADCC-55C407AA6B4E}" type="datetimeFigureOut">
               <a:rPr lang="en-US" smtClean="0"/>
+              <a:t>4/10/2024</a:t>
             </a:fld>
             <a:endParaRPr lang="en-US"/>
           </a:p>
@@ -461,7 +680,6 @@
               <a:rPr lang="en-CA"/>
               <a:t>Click to edit Master text styles</a:t>
             </a:r>
-            <a:endParaRPr lang="en-CA"/>
           </a:p>
           <a:p>
             <a:pPr lvl="1"/>
@@ -469,7 +687,6 @@
               <a:rPr lang="en-CA"/>
               <a:t>Second level</a:t>
             </a:r>
-            <a:endParaRPr lang="en-CA"/>
           </a:p>
           <a:p>
             <a:pPr lvl="2"/>
@@ -477,7 +694,6 @@
               <a:rPr lang="en-CA"/>
               <a:t>Third level</a:t>
             </a:r>
-            <a:endParaRPr lang="en-CA"/>
           </a:p>
           <a:p>
             <a:pPr lvl="3"/>
@@ -485,7 +701,6 @@
               <a:rPr lang="en-CA"/>
               <a:t>Fourth level</a:t>
             </a:r>
-            <a:endParaRPr lang="en-CA"/>
           </a:p>
           <a:p>
             <a:pPr lvl="4"/>
@@ -557,6 +772,7 @@
           <a:p>
             <a:fld id="{5C8DFA54-D39D-1D48-8493-93DD07969464}" type="slidenum">
               <a:rPr lang="en-US" smtClean="0"/>
+              <a:t>‹#›</a:t>
             </a:fld>
             <a:endParaRPr lang="en-US"/>
           </a:p>
@@ -699,7 +915,6 @@
               <a:rPr lang="en-US"/>
               <a:t>Ex. 1: Grey heron</a:t>
             </a:r>
-            <a:endParaRPr lang="en-US"/>
           </a:p>
         </p:txBody>
       </p:sp>
@@ -779,6 +994,7 @@
           <a:p>
             <a:fld id="{3F822814-AE0B-44AD-8B1E-57DEEA455097}" type="slidenum">
               <a:rPr lang="en-US"/>
+              <a:t>10</a:t>
             </a:fld>
             <a:endParaRPr lang="en-US"/>
           </a:p>
@@ -857,6 +1073,7 @@
           <a:p>
             <a:fld id="{3F822814-AE0B-44AD-8B1E-57DEEA455097}" type="slidenum">
               <a:rPr lang="en-US"/>
+              <a:t>11</a:t>
             </a:fld>
             <a:endParaRPr lang="en-US"/>
           </a:p>
@@ -939,7 +1156,6 @@
               <a:rPr lang="en-US"/>
               <a:t>Ex. 1: Grey heron</a:t>
             </a:r>
-            <a:endParaRPr lang="en-US"/>
           </a:p>
         </p:txBody>
       </p:sp>
@@ -1023,7 +1239,6 @@
               <a:rPr lang="en-US"/>
               <a:t>Ex. 1: Grey heron</a:t>
             </a:r>
-            <a:endParaRPr lang="en-US"/>
           </a:p>
         </p:txBody>
       </p:sp>
@@ -1107,7 +1322,6 @@
               <a:rPr lang="en-US"/>
               <a:t>Ex. 1: Grey heron</a:t>
             </a:r>
-            <a:endParaRPr lang="en-US"/>
           </a:p>
         </p:txBody>
       </p:sp>
@@ -1191,7 +1405,6 @@
               <a:rPr lang="en-US"/>
               <a:t>Ex. 1: Grey heron</a:t>
             </a:r>
-            <a:endParaRPr lang="en-US"/>
           </a:p>
         </p:txBody>
       </p:sp>
@@ -1275,7 +1488,6 @@
               <a:rPr lang="en-US"/>
               <a:t>Ex. 1: Grey heron</a:t>
             </a:r>
-            <a:endParaRPr lang="en-US"/>
           </a:p>
         </p:txBody>
       </p:sp>
@@ -1359,7 +1571,6 @@
               <a:rPr lang="en-US"/>
               <a:t>Ex. 1: Grey heron</a:t>
             </a:r>
-            <a:endParaRPr lang="en-US"/>
           </a:p>
         </p:txBody>
       </p:sp>
@@ -1443,7 +1654,6 @@
               <a:rPr lang="en-US"/>
               <a:t>Ex. 1: Grey heron</a:t>
             </a:r>
-            <a:endParaRPr lang="en-US"/>
           </a:p>
         </p:txBody>
       </p:sp>
@@ -1527,7 +1737,6 @@
               <a:rPr lang="en-US"/>
               <a:t>Ex. 1: Grey heron</a:t>
             </a:r>
-            <a:endParaRPr lang="en-US"/>
           </a:p>
         </p:txBody>
       </p:sp>
@@ -1611,7 +1820,6 @@
               <a:rPr lang="en-US"/>
               <a:t>Ex. 1: Grey heron</a:t>
             </a:r>
-            <a:endParaRPr lang="en-US"/>
           </a:p>
         </p:txBody>
       </p:sp>
@@ -1695,7 +1903,6 @@
               <a:rPr lang="en-US"/>
               <a:t>Ex. 1: Grey heron</a:t>
             </a:r>
-            <a:endParaRPr lang="en-US"/>
           </a:p>
         </p:txBody>
       </p:sp>
@@ -1779,7 +1986,6 @@
               <a:rPr lang="en-US"/>
               <a:t>Ex. 1: Grey heron</a:t>
             </a:r>
-            <a:endParaRPr lang="en-US"/>
           </a:p>
         </p:txBody>
       </p:sp>
@@ -1859,6 +2065,7 @@
           <a:p>
             <a:fld id="{C3E72B4D-2ECC-4C20-83B0-76D522B51B74}" type="slidenum">
               <a:rPr lang="en-US"/>
+              <a:t>7</a:t>
             </a:fld>
             <a:endParaRPr lang="en-US"/>
           </a:p>
@@ -1897,9 +2104,6 @@
               </a:rPr>
               <a:t>Changes in population size through time are a function of births, deaths, immigration, and emigration.  </a:t>
             </a:r>
-            <a:endParaRPr lang="en-US" b="1" dirty="0">
-              <a:latin typeface="Tahoma" panose="020B0604030504040204" pitchFamily="34" charset="0"/>
-            </a:endParaRPr>
           </a:p>
           <a:p>
             <a:r>
@@ -1920,9 +2124,6 @@
               </a:rPr>
               <a:t> models we have considered until now have only estimated apparent survival rates. </a:t>
             </a:r>
-            <a:endParaRPr lang="en-US" b="1" dirty="0">
-              <a:latin typeface="Tahoma" panose="020B0604030504040204" pitchFamily="34" charset="0"/>
-            </a:endParaRPr>
           </a:p>
           <a:p>
             <a:r>
@@ -1931,9 +2132,6 @@
               </a:rPr>
               <a:t>That is, true survival, the portion of individuals surviving between sampling occasions is confounded with permanent emigration.  </a:t>
             </a:r>
-            <a:endParaRPr lang="en-US" b="1" dirty="0">
-              <a:latin typeface="Tahoma" panose="020B0604030504040204" pitchFamily="34" charset="0"/>
-            </a:endParaRPr>
           </a:p>
           <a:p>
             <a:r>
@@ -1942,9 +2140,6 @@
               </a:rPr>
               <a:t>I spoke briefly on closed models that assume that size of the population remained unchanged between sampling events.  </a:t>
             </a:r>
-            <a:endParaRPr lang="en-US" b="1" dirty="0">
-              <a:latin typeface="Tahoma" panose="020B0604030504040204" pitchFamily="34" charset="0"/>
-            </a:endParaRPr>
           </a:p>
           <a:p>
             <a:r>
@@ -1953,9 +2148,6 @@
               </a:rPr>
               <a:t>Robust design integrates the advantages of both types of models.  </a:t>
             </a:r>
-            <a:endParaRPr lang="en-US" b="1" dirty="0">
-              <a:latin typeface="Tahoma" panose="020B0604030504040204" pitchFamily="34" charset="0"/>
-            </a:endParaRPr>
           </a:p>
           <a:p>
             <a:r>
@@ -1964,9 +2156,6 @@
               </a:rPr>
               <a:t>Although this model is complicated, it brings more biological reality to the analysis of population dynamics.  </a:t>
             </a:r>
-            <a:endParaRPr lang="en-US" b="1" dirty="0">
-              <a:latin typeface="Tahoma" panose="020B0604030504040204" pitchFamily="34" charset="0"/>
-            </a:endParaRPr>
           </a:p>
           <a:p>
             <a:r>
@@ -1975,9 +2164,6 @@
               </a:rPr>
               <a:t>This method provides for the estimation of parameters that are not estimable under either open or closed models as well as more robust estimates of the familiar parameters of interest.</a:t>
             </a:r>
-            <a:endParaRPr lang="en-US" b="1" dirty="0">
-              <a:latin typeface="Tahoma" panose="020B0604030504040204" pitchFamily="34" charset="0"/>
-            </a:endParaRPr>
           </a:p>
           <a:p>
             <a:endParaRPr lang="en-US" dirty="0"/>
@@ -2026,6 +2212,7 @@
           <a:p>
             <a:fld id="{C3E72B4D-2ECC-4C20-83B0-76D522B51B74}" type="slidenum">
               <a:rPr lang="en-US"/>
+              <a:t>8</a:t>
             </a:fld>
             <a:endParaRPr lang="en-US"/>
           </a:p>
@@ -2064,9 +2251,6 @@
               </a:rPr>
               <a:t>Changes in population size through time are a function of births, deaths, immigration, and emigration.  </a:t>
             </a:r>
-            <a:endParaRPr lang="en-US" b="1">
-              <a:latin typeface="Tahoma" panose="020B0604030504040204" pitchFamily="34" charset="0"/>
-            </a:endParaRPr>
           </a:p>
           <a:p>
             <a:r>
@@ -2087,9 +2271,6 @@
               </a:rPr>
               <a:t> models we have considered until now have only estimated apparent survival rates. </a:t>
             </a:r>
-            <a:endParaRPr lang="en-US" b="1" dirty="0">
-              <a:latin typeface="Tahoma" panose="020B0604030504040204" pitchFamily="34" charset="0"/>
-            </a:endParaRPr>
           </a:p>
           <a:p>
             <a:r>
@@ -2098,9 +2279,6 @@
               </a:rPr>
               <a:t>That is, true survival, the portion of individuals surviving between sampling occasions is confounded with permanent emigration.  </a:t>
             </a:r>
-            <a:endParaRPr lang="en-US" b="1" dirty="0">
-              <a:latin typeface="Tahoma" panose="020B0604030504040204" pitchFamily="34" charset="0"/>
-            </a:endParaRPr>
           </a:p>
           <a:p>
             <a:r>
@@ -2109,9 +2287,6 @@
               </a:rPr>
               <a:t>I spoke briefly on closed models that assume that size of the population remained unchanged between sampling events.  </a:t>
             </a:r>
-            <a:endParaRPr lang="en-US" b="1" dirty="0">
-              <a:latin typeface="Tahoma" panose="020B0604030504040204" pitchFamily="34" charset="0"/>
-            </a:endParaRPr>
           </a:p>
           <a:p>
             <a:r>
@@ -2120,9 +2295,6 @@
               </a:rPr>
               <a:t>Robust design integrates the advantages of both types of models.  </a:t>
             </a:r>
-            <a:endParaRPr lang="en-US" b="1" dirty="0">
-              <a:latin typeface="Tahoma" panose="020B0604030504040204" pitchFamily="34" charset="0"/>
-            </a:endParaRPr>
           </a:p>
           <a:p>
             <a:r>
@@ -2131,9 +2303,6 @@
               </a:rPr>
               <a:t>Although this model is complicated, it brings more biological reality to the analysis of population dynamics.  </a:t>
             </a:r>
-            <a:endParaRPr lang="en-US" b="1" dirty="0">
-              <a:latin typeface="Tahoma" panose="020B0604030504040204" pitchFamily="34" charset="0"/>
-            </a:endParaRPr>
           </a:p>
           <a:p>
             <a:r>
@@ -2142,9 +2311,6 @@
               </a:rPr>
               <a:t>This method provides for the estimation of parameters that are not estimable under either open or closed models as well as more robust estimates of the familiar parameters of interest.</a:t>
             </a:r>
-            <a:endParaRPr lang="en-US" b="1" dirty="0">
-              <a:latin typeface="Tahoma" panose="020B0604030504040204" pitchFamily="34" charset="0"/>
-            </a:endParaRPr>
           </a:p>
           <a:p>
             <a:endParaRPr lang="en-US" dirty="0"/>
@@ -2193,6 +2359,7 @@
           <a:p>
             <a:fld id="{3F822814-AE0B-44AD-8B1E-57DEEA455097}" type="slidenum">
               <a:rPr lang="en-US"/>
+              <a:t>9</a:t>
             </a:fld>
             <a:endParaRPr lang="en-US"/>
           </a:p>
@@ -2418,6 +2585,7 @@
           <a:p>
             <a:fld id="{3C37BFD8-13BE-B34C-9D38-93A96E46EA28}" type="datetime1">
               <a:rPr lang="en-CA" smtClean="0"/>
+              <a:t>2024-04-10</a:t>
             </a:fld>
             <a:endParaRPr lang="en-US"/>
           </a:p>
@@ -2459,6 +2627,7 @@
           <a:p>
             <a:fld id="{5E36FFF3-8FBC-2144-A340-2B54F44226F0}" type="slidenum">
               <a:rPr lang="en-US" smtClean="0"/>
+              <a:t>‹#›</a:t>
             </a:fld>
             <a:endParaRPr lang="en-US"/>
           </a:p>
@@ -2532,7 +2701,6 @@
               <a:rPr lang="en-CA"/>
               <a:t>Click to edit Master text styles</a:t>
             </a:r>
-            <a:endParaRPr lang="en-CA"/>
           </a:p>
           <a:p>
             <a:pPr lvl="1"/>
@@ -2540,7 +2708,6 @@
               <a:rPr lang="en-CA"/>
               <a:t>Second level</a:t>
             </a:r>
-            <a:endParaRPr lang="en-CA"/>
           </a:p>
           <a:p>
             <a:pPr lvl="2"/>
@@ -2548,7 +2715,6 @@
               <a:rPr lang="en-CA"/>
               <a:t>Third level</a:t>
             </a:r>
-            <a:endParaRPr lang="en-CA"/>
           </a:p>
           <a:p>
             <a:pPr lvl="3"/>
@@ -2556,7 +2722,6 @@
               <a:rPr lang="en-CA"/>
               <a:t>Fourth level</a:t>
             </a:r>
-            <a:endParaRPr lang="en-CA"/>
           </a:p>
           <a:p>
             <a:pPr lvl="4"/>
@@ -2585,6 +2750,7 @@
           <a:p>
             <a:fld id="{06F60D8B-6047-3E47-9E7D-4122E207D896}" type="datetime1">
               <a:rPr lang="en-CA" smtClean="0"/>
+              <a:t>2024-04-10</a:t>
             </a:fld>
             <a:endParaRPr lang="en-US"/>
           </a:p>
@@ -2626,6 +2792,7 @@
           <a:p>
             <a:fld id="{5E36FFF3-8FBC-2144-A340-2B54F44226F0}" type="slidenum">
               <a:rPr lang="en-US" smtClean="0"/>
+              <a:t>‹#›</a:t>
             </a:fld>
             <a:endParaRPr lang="en-US"/>
           </a:p>
@@ -2709,7 +2876,6 @@
               <a:rPr lang="en-CA"/>
               <a:t>Click to edit Master text styles</a:t>
             </a:r>
-            <a:endParaRPr lang="en-CA"/>
           </a:p>
           <a:p>
             <a:pPr lvl="1"/>
@@ -2717,7 +2883,6 @@
               <a:rPr lang="en-CA"/>
               <a:t>Second level</a:t>
             </a:r>
-            <a:endParaRPr lang="en-CA"/>
           </a:p>
           <a:p>
             <a:pPr lvl="2"/>
@@ -2725,7 +2890,6 @@
               <a:rPr lang="en-CA"/>
               <a:t>Third level</a:t>
             </a:r>
-            <a:endParaRPr lang="en-CA"/>
           </a:p>
           <a:p>
             <a:pPr lvl="3"/>
@@ -2733,7 +2897,6 @@
               <a:rPr lang="en-CA"/>
               <a:t>Fourth level</a:t>
             </a:r>
-            <a:endParaRPr lang="en-CA"/>
           </a:p>
           <a:p>
             <a:pPr lvl="4"/>
@@ -2762,6 +2925,7 @@
           <a:p>
             <a:fld id="{CDA80F54-3091-F744-960B-084737488211}" type="datetime1">
               <a:rPr lang="en-CA" smtClean="0"/>
+              <a:t>2024-04-10</a:t>
             </a:fld>
             <a:endParaRPr lang="en-US"/>
           </a:p>
@@ -2803,6 +2967,7 @@
           <a:p>
             <a:fld id="{5E36FFF3-8FBC-2144-A340-2B54F44226F0}" type="slidenum">
               <a:rPr lang="en-US" smtClean="0"/>
+              <a:t>‹#›</a:t>
             </a:fld>
             <a:endParaRPr lang="en-US"/>
           </a:p>
@@ -2876,7 +3041,6 @@
               <a:rPr lang="en-CA"/>
               <a:t>Click to edit Master text styles</a:t>
             </a:r>
-            <a:endParaRPr lang="en-CA"/>
           </a:p>
           <a:p>
             <a:pPr lvl="1"/>
@@ -2884,7 +3048,6 @@
               <a:rPr lang="en-CA"/>
               <a:t>Second level</a:t>
             </a:r>
-            <a:endParaRPr lang="en-CA"/>
           </a:p>
           <a:p>
             <a:pPr lvl="2"/>
@@ -2892,7 +3055,6 @@
               <a:rPr lang="en-CA"/>
               <a:t>Third level</a:t>
             </a:r>
-            <a:endParaRPr lang="en-CA"/>
           </a:p>
           <a:p>
             <a:pPr lvl="3"/>
@@ -2900,7 +3062,6 @@
               <a:rPr lang="en-CA"/>
               <a:t>Fourth level</a:t>
             </a:r>
-            <a:endParaRPr lang="en-CA"/>
           </a:p>
           <a:p>
             <a:pPr lvl="4"/>
@@ -2929,6 +3090,7 @@
           <a:p>
             <a:fld id="{29610203-3692-EE42-9F0C-0A601B9B7F08}" type="datetime1">
               <a:rPr lang="en-CA" smtClean="0"/>
+              <a:t>2024-04-10</a:t>
             </a:fld>
             <a:endParaRPr lang="en-US"/>
           </a:p>
@@ -2970,6 +3132,7 @@
           <a:p>
             <a:fld id="{5E36FFF3-8FBC-2144-A340-2B54F44226F0}" type="slidenum">
               <a:rPr lang="en-US" smtClean="0"/>
+              <a:t>‹#›</a:t>
             </a:fld>
             <a:endParaRPr lang="en-US"/>
           </a:p>
@@ -3148,7 +3311,6 @@
               <a:rPr lang="en-CA"/>
               <a:t>Click to edit Master text styles</a:t>
             </a:r>
-            <a:endParaRPr lang="en-CA"/>
           </a:p>
         </p:txBody>
       </p:sp>
@@ -3169,6 +3331,7 @@
           <a:p>
             <a:fld id="{1DFC2748-9D98-3F49-B5F9-742FAC37F4F9}" type="datetime1">
               <a:rPr lang="en-CA" smtClean="0"/>
+              <a:t>2024-04-10</a:t>
             </a:fld>
             <a:endParaRPr lang="en-US"/>
           </a:p>
@@ -3210,6 +3373,7 @@
           <a:p>
             <a:fld id="{5E36FFF3-8FBC-2144-A340-2B54F44226F0}" type="slidenum">
               <a:rPr lang="en-US" smtClean="0"/>
+              <a:t>‹#›</a:t>
             </a:fld>
             <a:endParaRPr lang="en-US"/>
           </a:p>
@@ -3316,7 +3480,6 @@
               <a:rPr lang="en-CA"/>
               <a:t>Click to edit Master text styles</a:t>
             </a:r>
-            <a:endParaRPr lang="en-CA"/>
           </a:p>
           <a:p>
             <a:pPr lvl="1"/>
@@ -3324,7 +3487,6 @@
               <a:rPr lang="en-CA"/>
               <a:t>Second level</a:t>
             </a:r>
-            <a:endParaRPr lang="en-CA"/>
           </a:p>
           <a:p>
             <a:pPr lvl="2"/>
@@ -3332,7 +3494,6 @@
               <a:rPr lang="en-CA"/>
               <a:t>Third level</a:t>
             </a:r>
-            <a:endParaRPr lang="en-CA"/>
           </a:p>
           <a:p>
             <a:pPr lvl="3"/>
@@ -3340,7 +3501,6 @@
               <a:rPr lang="en-CA"/>
               <a:t>Fourth level</a:t>
             </a:r>
-            <a:endParaRPr lang="en-CA"/>
           </a:p>
           <a:p>
             <a:pPr lvl="4"/>
@@ -3405,7 +3565,6 @@
               <a:rPr lang="en-CA"/>
               <a:t>Click to edit Master text styles</a:t>
             </a:r>
-            <a:endParaRPr lang="en-CA"/>
           </a:p>
           <a:p>
             <a:pPr lvl="1"/>
@@ -3413,7 +3572,6 @@
               <a:rPr lang="en-CA"/>
               <a:t>Second level</a:t>
             </a:r>
-            <a:endParaRPr lang="en-CA"/>
           </a:p>
           <a:p>
             <a:pPr lvl="2"/>
@@ -3421,7 +3579,6 @@
               <a:rPr lang="en-CA"/>
               <a:t>Third level</a:t>
             </a:r>
-            <a:endParaRPr lang="en-CA"/>
           </a:p>
           <a:p>
             <a:pPr lvl="3"/>
@@ -3429,7 +3586,6 @@
               <a:rPr lang="en-CA"/>
               <a:t>Fourth level</a:t>
             </a:r>
-            <a:endParaRPr lang="en-CA"/>
           </a:p>
           <a:p>
             <a:pPr lvl="4"/>
@@ -3458,6 +3614,7 @@
           <a:p>
             <a:fld id="{5777F1FD-AACD-9948-9283-1F9691DFC0B4}" type="datetime1">
               <a:rPr lang="en-CA" smtClean="0"/>
+              <a:t>2024-04-10</a:t>
             </a:fld>
             <a:endParaRPr lang="en-US"/>
           </a:p>
@@ -3499,6 +3656,7 @@
           <a:p>
             <a:fld id="{5E36FFF3-8FBC-2144-A340-2B54F44226F0}" type="slidenum">
               <a:rPr lang="en-US" smtClean="0"/>
+              <a:t>‹#›</a:t>
             </a:fld>
             <a:endParaRPr lang="en-US"/>
           </a:p>
@@ -3618,7 +3776,6 @@
               <a:rPr lang="en-CA"/>
               <a:t>Click to edit Master text styles</a:t>
             </a:r>
-            <a:endParaRPr lang="en-CA"/>
           </a:p>
         </p:txBody>
       </p:sp>
@@ -3675,7 +3832,6 @@
               <a:rPr lang="en-CA"/>
               <a:t>Click to edit Master text styles</a:t>
             </a:r>
-            <a:endParaRPr lang="en-CA"/>
           </a:p>
           <a:p>
             <a:pPr lvl="1"/>
@@ -3683,7 +3839,6 @@
               <a:rPr lang="en-CA"/>
               <a:t>Second level</a:t>
             </a:r>
-            <a:endParaRPr lang="en-CA"/>
           </a:p>
           <a:p>
             <a:pPr lvl="2"/>
@@ -3691,7 +3846,6 @@
               <a:rPr lang="en-CA"/>
               <a:t>Third level</a:t>
             </a:r>
-            <a:endParaRPr lang="en-CA"/>
           </a:p>
           <a:p>
             <a:pPr lvl="3"/>
@@ -3699,7 +3853,6 @@
               <a:rPr lang="en-CA"/>
               <a:t>Fourth level</a:t>
             </a:r>
-            <a:endParaRPr lang="en-CA"/>
           </a:p>
           <a:p>
             <a:pPr lvl="4"/>
@@ -3773,7 +3926,6 @@
               <a:rPr lang="en-CA"/>
               <a:t>Click to edit Master text styles</a:t>
             </a:r>
-            <a:endParaRPr lang="en-CA"/>
           </a:p>
         </p:txBody>
       </p:sp>
@@ -3830,7 +3982,6 @@
               <a:rPr lang="en-CA"/>
               <a:t>Click to edit Master text styles</a:t>
             </a:r>
-            <a:endParaRPr lang="en-CA"/>
           </a:p>
           <a:p>
             <a:pPr lvl="1"/>
@@ -3838,7 +3989,6 @@
               <a:rPr lang="en-CA"/>
               <a:t>Second level</a:t>
             </a:r>
-            <a:endParaRPr lang="en-CA"/>
           </a:p>
           <a:p>
             <a:pPr lvl="2"/>
@@ -3846,7 +3996,6 @@
               <a:rPr lang="en-CA"/>
               <a:t>Third level</a:t>
             </a:r>
-            <a:endParaRPr lang="en-CA"/>
           </a:p>
           <a:p>
             <a:pPr lvl="3"/>
@@ -3854,7 +4003,6 @@
               <a:rPr lang="en-CA"/>
               <a:t>Fourth level</a:t>
             </a:r>
-            <a:endParaRPr lang="en-CA"/>
           </a:p>
           <a:p>
             <a:pPr lvl="4"/>
@@ -3883,6 +4031,7 @@
           <a:p>
             <a:fld id="{790B582B-6698-EC48-875C-50CEAA3C67F4}" type="datetime1">
               <a:rPr lang="en-CA" smtClean="0"/>
+              <a:t>2024-04-10</a:t>
             </a:fld>
             <a:endParaRPr lang="en-US"/>
           </a:p>
@@ -3924,6 +4073,7 @@
           <a:p>
             <a:fld id="{5E36FFF3-8FBC-2144-A340-2B54F44226F0}" type="slidenum">
               <a:rPr lang="en-US" smtClean="0"/>
+              <a:t>‹#›</a:t>
             </a:fld>
             <a:endParaRPr lang="en-US"/>
           </a:p>
@@ -3994,6 +4144,7 @@
           <a:p>
             <a:fld id="{95E36D6D-CCCE-B749-8D34-846F8A67EFC0}" type="datetime1">
               <a:rPr lang="en-CA" smtClean="0"/>
+              <a:t>2024-04-10</a:t>
             </a:fld>
             <a:endParaRPr lang="en-US"/>
           </a:p>
@@ -4035,6 +4186,7 @@
           <a:p>
             <a:fld id="{5E36FFF3-8FBC-2144-A340-2B54F44226F0}" type="slidenum">
               <a:rPr lang="en-US" smtClean="0"/>
+              <a:t>‹#›</a:t>
             </a:fld>
             <a:endParaRPr lang="en-US"/>
           </a:p>
@@ -4082,6 +4234,7 @@
           <a:p>
             <a:fld id="{81D6EB7D-0180-5147-9FFD-9F568677AE1E}" type="datetime1">
               <a:rPr lang="en-CA" smtClean="0"/>
+              <a:t>2024-04-10</a:t>
             </a:fld>
             <a:endParaRPr lang="en-US"/>
           </a:p>
@@ -4123,6 +4276,7 @@
           <a:p>
             <a:fld id="{5E36FFF3-8FBC-2144-A340-2B54F44226F0}" type="slidenum">
               <a:rPr lang="en-US" smtClean="0"/>
+              <a:t>‹#›</a:t>
             </a:fld>
             <a:endParaRPr lang="en-US"/>
           </a:p>
@@ -4238,7 +4392,6 @@
               <a:rPr lang="en-CA"/>
               <a:t>Click to edit Master text styles</a:t>
             </a:r>
-            <a:endParaRPr lang="en-CA"/>
           </a:p>
           <a:p>
             <a:pPr lvl="1"/>
@@ -4246,7 +4399,6 @@
               <a:rPr lang="en-CA"/>
               <a:t>Second level</a:t>
             </a:r>
-            <a:endParaRPr lang="en-CA"/>
           </a:p>
           <a:p>
             <a:pPr lvl="2"/>
@@ -4254,7 +4406,6 @@
               <a:rPr lang="en-CA"/>
               <a:t>Third level</a:t>
             </a:r>
-            <a:endParaRPr lang="en-CA"/>
           </a:p>
           <a:p>
             <a:pPr lvl="3"/>
@@ -4262,7 +4413,6 @@
               <a:rPr lang="en-CA"/>
               <a:t>Fourth level</a:t>
             </a:r>
-            <a:endParaRPr lang="en-CA"/>
           </a:p>
           <a:p>
             <a:pPr lvl="4"/>
@@ -4336,7 +4486,6 @@
               <a:rPr lang="en-CA"/>
               <a:t>Click to edit Master text styles</a:t>
             </a:r>
-            <a:endParaRPr lang="en-CA"/>
           </a:p>
         </p:txBody>
       </p:sp>
@@ -4357,6 +4506,7 @@
           <a:p>
             <a:fld id="{09853B9D-1BC3-8D45-B4A5-24010FA1B146}" type="datetime1">
               <a:rPr lang="en-CA" smtClean="0"/>
+              <a:t>2024-04-10</a:t>
             </a:fld>
             <a:endParaRPr lang="en-US"/>
           </a:p>
@@ -4398,6 +4548,7 @@
           <a:p>
             <a:fld id="{5E36FFF3-8FBC-2144-A340-2B54F44226F0}" type="slidenum">
               <a:rPr lang="en-US" smtClean="0"/>
+              <a:t>‹#›</a:t>
             </a:fld>
             <a:endParaRPr lang="en-US"/>
           </a:p>
@@ -4583,7 +4734,6 @@
               <a:rPr lang="en-CA"/>
               <a:t>Click to edit Master text styles</a:t>
             </a:r>
-            <a:endParaRPr lang="en-CA"/>
           </a:p>
         </p:txBody>
       </p:sp>
@@ -4604,6 +4754,7 @@
           <a:p>
             <a:fld id="{511B706C-2B08-8E43-97C9-BC50088B1CD1}" type="datetime1">
               <a:rPr lang="en-CA" smtClean="0"/>
+              <a:t>2024-04-10</a:t>
             </a:fld>
             <a:endParaRPr lang="en-US"/>
           </a:p>
@@ -4645,6 +4796,7 @@
           <a:p>
             <a:fld id="{5E36FFF3-8FBC-2144-A340-2B54F44226F0}" type="slidenum">
               <a:rPr lang="en-US" smtClean="0"/>
+              <a:t>‹#›</a:t>
             </a:fld>
             <a:endParaRPr lang="en-US"/>
           </a:p>
@@ -4743,7 +4895,6 @@
               <a:rPr lang="en-CA" dirty="0"/>
               <a:t>Click to edit Master text styles</a:t>
             </a:r>
-            <a:endParaRPr lang="en-CA" dirty="0"/>
           </a:p>
           <a:p>
             <a:pPr lvl="1"/>
@@ -4751,7 +4902,6 @@
               <a:rPr lang="en-CA" dirty="0"/>
               <a:t>Second level</a:t>
             </a:r>
-            <a:endParaRPr lang="en-CA" dirty="0"/>
           </a:p>
           <a:p>
             <a:pPr lvl="2"/>
@@ -4759,7 +4909,6 @@
               <a:rPr lang="en-CA" dirty="0"/>
               <a:t>Third level</a:t>
             </a:r>
-            <a:endParaRPr lang="en-CA" dirty="0"/>
           </a:p>
           <a:p>
             <a:pPr lvl="3"/>
@@ -4767,7 +4916,6 @@
               <a:rPr lang="en-CA" dirty="0"/>
               <a:t>Fourth level</a:t>
             </a:r>
-            <a:endParaRPr lang="en-CA" dirty="0"/>
           </a:p>
           <a:p>
             <a:pPr lvl="4"/>
@@ -4814,6 +4962,7 @@
           <a:p>
             <a:fld id="{0F5A7869-BEC3-AC47-8AE5-EC3C0C76D79E}" type="datetime1">
               <a:rPr lang="en-CA" smtClean="0"/>
+              <a:t>2024-04-10</a:t>
             </a:fld>
             <a:endParaRPr lang="en-US"/>
           </a:p>
@@ -4891,6 +5040,7 @@
           <a:p>
             <a:fld id="{5E36FFF3-8FBC-2144-A340-2B54F44226F0}" type="slidenum">
               <a:rPr lang="en-US" smtClean="0"/>
+              <a:t>‹#›</a:t>
             </a:fld>
             <a:endParaRPr lang="en-US" dirty="0"/>
           </a:p>
@@ -5244,7 +5394,7 @@
         </p:spPr>
         <p:txBody>
           <a:bodyPr>
-            <a:normAutofit fontScale="75000"/>
+            <a:normAutofit fontScale="90000" lnSpcReduction="10000"/>
           </a:bodyPr>
           <a:lstStyle/>
           <a:p>
@@ -5282,10 +5432,6 @@
               </a:rPr>
               <a:t>Robust Design Occupancy</a:t>
             </a:r>
-            <a:endParaRPr lang="en-US" b="1" dirty="0">
-              <a:latin typeface="Arial" panose="020B0604020202020204" pitchFamily="34" charset="0"/>
-              <a:cs typeface="Arial" panose="020B0604020202020204" pitchFamily="34" charset="0"/>
-            </a:endParaRPr>
           </a:p>
           <a:p>
             <a:pPr marL="574675" indent="-509905" algn="l" eaLnBrk="1" hangingPunct="1"/>
@@ -5318,15 +5464,7 @@
                 <a:cs typeface="Arial" panose="020B0604020202020204" pitchFamily="34" charset="0"/>
                 <a:sym typeface="+mn-ea"/>
               </a:rPr>
-              <a:t>占用</a:t>
-            </a:r>
-            <a:r>
-              <a:rPr lang="zh-CN" altLang="en-US" b="1" dirty="0">
-                <a:latin typeface="Arial" panose="020B0604020202020204" pitchFamily="34" charset="0"/>
-                <a:cs typeface="Arial" panose="020B0604020202020204" pitchFamily="34" charset="0"/>
-                <a:sym typeface="+mn-ea"/>
-              </a:rPr>
-              <a:t>模型</a:t>
+              <a:t>占用模型</a:t>
             </a:r>
             <a:r>
               <a:rPr lang="en-US" b="1" dirty="0">
@@ -5359,11 +5497,6 @@
               </a:rPr>
               <a:t>设计占用模型</a:t>
             </a:r>
-            <a:endParaRPr lang="zh-CN" altLang="en-US" b="1" dirty="0">
-              <a:latin typeface="Arial" panose="020B0604020202020204" pitchFamily="34" charset="0"/>
-              <a:cs typeface="Arial" panose="020B0604020202020204" pitchFamily="34" charset="0"/>
-              <a:sym typeface="+mn-ea"/>
-            </a:endParaRPr>
           </a:p>
         </p:txBody>
       </p:sp>
@@ -5445,7 +5578,6 @@
               <a:rPr lang="en-US" dirty="0"/>
               <a:t>Evaluate probability of extinction and colonization</a:t>
             </a:r>
-            <a:endParaRPr lang="en-US" dirty="0"/>
           </a:p>
           <a:p>
             <a:r>
@@ -5467,8 +5599,8 @@
           </a:p>
         </p:txBody>
       </p:sp>
-      <mc:AlternateContent xmlns:mc="http://schemas.openxmlformats.org/markup-compatibility/2006">
-        <mc:Choice xmlns:a14="http://schemas.microsoft.com/office/drawing/2010/main" Requires="a14">
+      <mc:AlternateContent xmlns:mc="http://schemas.openxmlformats.org/markup-compatibility/2006" xmlns:a14="http://schemas.microsoft.com/office/drawing/2010/main">
+        <mc:Choice Requires="a14">
           <p:sp>
             <p:nvSpPr>
               <p:cNvPr id="2" name="Rectangle 1"/>
@@ -5530,7 +5662,6 @@
                   <a:rPr lang="en-US" sz="2400" b="1" dirty="0"/>
                   <a:t>)</a:t>
                 </a:r>
-                <a:endParaRPr lang="en-US" sz="2400" b="1" dirty="0"/>
               </a:p>
               <a:p>
                 <a:pPr algn="ctr" defTabSz="914400" eaLnBrk="0" fontAlgn="base" hangingPunct="0">
@@ -5712,7 +5843,7 @@
             </p:txBody>
           </p:sp>
         </mc:Choice>
-        <mc:Fallback>
+        <mc:Fallback xmlns="">
           <p:sp>
             <p:nvSpPr>
               <p:cNvPr id="2" name="Rectangle 1"/>
@@ -5730,7 +5861,7 @@
                 <a:avLst/>
               </a:prstGeom>
               <a:blipFill rotWithShape="1">
-                <a:blip r:embed="rId1"/>
+                <a:blip r:embed="rId3"/>
                 <a:stretch>
                   <a:fillRect/>
                 </a:stretch>
@@ -5808,7 +5939,6 @@
               <a:rPr lang="en-US"/>
               <a:t> </a:t>
             </a:r>
-            <a:endParaRPr lang="en-US"/>
           </a:p>
         </p:txBody>
       </p:sp>
@@ -5831,14 +5961,12 @@
               <a:rPr lang="en-US"/>
               <a:t>Sample over two temporal scales.</a:t>
             </a:r>
-            <a:endParaRPr lang="en-US"/>
           </a:p>
           <a:p>
             <a:r>
               <a:rPr lang="en-US"/>
               <a:t>Only disadvantage - cost </a:t>
             </a:r>
-            <a:endParaRPr lang="en-US"/>
           </a:p>
           <a:p>
             <a:pPr lvl="1"/>
@@ -5846,7 +5974,6 @@
               <a:rPr lang="en-US"/>
               <a:t>more than one sampling occasion each session.</a:t>
             </a:r>
-            <a:endParaRPr lang="en-US"/>
           </a:p>
           <a:p>
             <a:pPr marL="456565" lvl="1" indent="0">
@@ -5966,9 +6093,6 @@
               </a:rPr>
               <a:t>采样。</a:t>
             </a:r>
-            <a:endParaRPr lang="zh-CN" altLang="en-US">
-              <a:sym typeface="+mn-ea"/>
-            </a:endParaRPr>
           </a:p>
         </p:txBody>
       </p:sp>
@@ -6032,13 +6156,8 @@
             </a:r>
             <a:r>
               <a:rPr lang="zh-CN" altLang="en-US" dirty="0"/>
-              <a:t>主要</a:t>
-            </a:r>
-            <a:r>
-              <a:rPr lang="zh-CN" altLang="en-US" dirty="0"/>
-              <a:t>假设</a:t>
-            </a:r>
-            <a:endParaRPr lang="zh-CN" altLang="en-US" dirty="0"/>
+              <a:t>主要假设</a:t>
+            </a:r>
           </a:p>
         </p:txBody>
       </p:sp>
@@ -6071,7 +6190,6 @@
               <a:rPr lang="en-US" sz="1750" dirty="0"/>
               <a:t>Species are not falsely detected. </a:t>
             </a:r>
-            <a:endParaRPr lang="en-US" sz="1750" dirty="0"/>
           </a:p>
           <a:p>
             <a:pPr marL="342900" lvl="1" indent="-342900" eaLnBrk="1" hangingPunct="1">
@@ -6081,7 +6199,6 @@
               <a:rPr lang="en-US" sz="1750" dirty="0"/>
               <a:t>The detection process is independent at each site</a:t>
             </a:r>
-            <a:endParaRPr lang="en-US" sz="1750" dirty="0"/>
           </a:p>
           <a:p>
             <a:pPr marL="342900" lvl="1" indent="-342900" eaLnBrk="1" hangingPunct="1">
@@ -6099,7 +6216,6 @@
               <a:rPr lang="en-US" sz="1750" dirty="0"/>
               <a:t> heterogeneity in occupancy </a:t>
             </a:r>
-            <a:endParaRPr lang="en-US" sz="1750" dirty="0"/>
           </a:p>
           <a:p>
             <a:pPr marL="342900" lvl="1" indent="-342900" eaLnBrk="1" hangingPunct="1">
@@ -6117,7 +6233,6 @@
               <a:rPr lang="en-US" sz="1750" dirty="0"/>
               <a:t> heterogeneity in detection </a:t>
             </a:r>
-            <a:endParaRPr lang="en-US" sz="1750" dirty="0"/>
           </a:p>
           <a:p>
             <a:pPr marL="342900" lvl="1" indent="-342900" eaLnBrk="1" hangingPunct="1">
@@ -6131,11 +6246,6 @@
               </a:rPr>
               <a:t>Closure:</a:t>
             </a:r>
-            <a:endParaRPr lang="en-US" sz="1750" b="1" dirty="0">
-              <a:solidFill>
-                <a:srgbClr val="C00000"/>
-              </a:solidFill>
-            </a:endParaRPr>
           </a:p>
           <a:p>
             <a:pPr marL="742950" lvl="2" indent="-342900" eaLnBrk="1" hangingPunct="1">
@@ -6162,9 +6272,6 @@
               </a:rPr>
               <a:t> periods</a:t>
             </a:r>
-            <a:endParaRPr lang="en-US" sz="1750" dirty="0">
-              <a:sym typeface="Symbol" panose="05050102010706020507" pitchFamily="18" charset="2"/>
-            </a:endParaRPr>
           </a:p>
           <a:p>
             <a:pPr marL="742950" lvl="2" indent="-342900" eaLnBrk="1" hangingPunct="1">
@@ -6218,9 +6325,6 @@
               </a:rPr>
               <a:t>between primary periods</a:t>
             </a:r>
-            <a:endParaRPr lang="en-US" sz="1750" dirty="0">
-              <a:sym typeface="Symbol" panose="05050102010706020507" pitchFamily="18" charset="2"/>
-            </a:endParaRPr>
           </a:p>
           <a:p>
             <a:pPr marL="742950" lvl="2" indent="-342900" eaLnBrk="1" hangingPunct="1">
@@ -6340,9 +6444,6 @@
               </a:rPr>
               <a:t>之间没有重新定居和灭绝</a:t>
             </a:r>
-            <a:endParaRPr lang="en-US" sz="1750" dirty="0">
-              <a:sym typeface="Symbol" panose="05050102010706020507" pitchFamily="18" charset="2"/>
-            </a:endParaRPr>
           </a:p>
           <a:p>
             <a:pPr marL="742950" lvl="2" indent="-342900" eaLnBrk="1" hangingPunct="1">
@@ -6384,9 +6485,6 @@
               </a:rPr>
               <a:t>的异质性</a:t>
             </a:r>
-            <a:endParaRPr lang="en-US" sz="1750">
-              <a:sym typeface="Symbol" panose="05050102010706020507" pitchFamily="18" charset="2"/>
-            </a:endParaRPr>
           </a:p>
         </p:txBody>
       </p:sp>
@@ -6453,17 +6551,12 @@
             </a:r>
             <a:r>
               <a:rPr lang="zh-CN" altLang="en-US" sz="3110"/>
-              <a:t>地块</a:t>
-            </a:r>
-            <a:r>
-              <a:rPr lang="zh-CN" altLang="en-US" sz="3110"/>
-              <a:t>占用</a:t>
+              <a:t>地块占用</a:t>
             </a:r>
             <a:r>
               <a:rPr lang="en-US" sz="3110"/>
               <a:t>：建模动态</a:t>
             </a:r>
-            <a:endParaRPr lang="en-US" sz="3110"/>
           </a:p>
         </p:txBody>
       </p:sp>
@@ -6499,7 +6592,6 @@
               <a:rPr lang="en-US" sz="1800" dirty="0"/>
               <a:t>Model changes in occupancy over time</a:t>
             </a:r>
-            <a:endParaRPr lang="en-US" sz="1800" dirty="0"/>
           </a:p>
           <a:p>
             <a:pPr eaLnBrk="1" hangingPunct="1">
@@ -6520,7 +6612,6 @@
               <a:rPr lang="en-US" sz="1800" dirty="0"/>
               <a:t>Parameters of interest:</a:t>
             </a:r>
-            <a:endParaRPr lang="en-US" sz="1800" dirty="0"/>
           </a:p>
           <a:p>
             <a:pPr marL="685800" lvl="1" indent="-228600">
@@ -6556,12 +6647,6 @@
               </a:rPr>
               <a:t>occupancy</a:t>
             </a:r>
-            <a:endParaRPr lang="en-US" sz="1800" b="1" dirty="0">
-              <a:solidFill>
-                <a:srgbClr val="FF0000"/>
-              </a:solidFill>
-              <a:sym typeface="Symbol" panose="05050102010706020507" pitchFamily="18" charset="2"/>
-            </a:endParaRPr>
           </a:p>
           <a:p>
             <a:pPr marL="860425" lvl="1" indent="-457200">
@@ -6843,11 +6928,6 @@
               </a:rPr>
               <a:t>probability</a:t>
             </a:r>
-            <a:endParaRPr lang="en-US" sz="1800" b="1" dirty="0">
-              <a:latin typeface="Arial" panose="020B0604020202020204" pitchFamily="34" charset="0"/>
-              <a:cs typeface="Arial" panose="020B0604020202020204" pitchFamily="34" charset="0"/>
-              <a:sym typeface="Symbol" panose="05050102010706020507" pitchFamily="18" charset="2"/>
-            </a:endParaRPr>
           </a:p>
           <a:p>
             <a:pPr lvl="1">
@@ -6931,9 +7011,6 @@
               </a:rPr>
               <a:t>概率</a:t>
             </a:r>
-            <a:endParaRPr lang="en-US" sz="1800" b="1" dirty="0">
-              <a:sym typeface="Symbol" panose="05050102010706020507" pitchFamily="18" charset="2"/>
-            </a:endParaRPr>
           </a:p>
           <a:p>
             <a:pPr marL="860425" lvl="1" indent="-457200">
@@ -7264,13 +7341,8 @@
             </a:br>
             <a:r>
               <a:rPr lang="zh-CN" altLang="en-US" dirty="0"/>
-              <a:t>概率</a:t>
-            </a:r>
-            <a:r>
-              <a:rPr lang="zh-CN" altLang="en-US" dirty="0"/>
-              <a:t>模型</a:t>
-            </a:r>
-            <a:endParaRPr lang="zh-CN" altLang="en-US" dirty="0"/>
+              <a:t>概率模型</a:t>
+            </a:r>
           </a:p>
         </p:txBody>
       </p:sp>
@@ -7296,9 +7368,6 @@
               </a:rPr>
               <a:t>Must account for probabilities of colonization &amp; extinction</a:t>
             </a:r>
-            <a:endParaRPr lang="en-US" dirty="0">
-              <a:sym typeface="Symbol" panose="05050102010706020507" pitchFamily="18" charset="2"/>
-            </a:endParaRPr>
           </a:p>
           <a:p>
             <a:pPr eaLnBrk="1" hangingPunct="1"/>
@@ -7308,9 +7377,6 @@
               </a:rPr>
               <a:t>必须考虑定居和灭绝的概率</a:t>
             </a:r>
-            <a:endParaRPr lang="zh-CN" altLang="en-US" dirty="0">
-              <a:sym typeface="Symbol" panose="05050102010706020507" pitchFamily="18" charset="2"/>
-            </a:endParaRPr>
           </a:p>
           <a:p>
             <a:pPr eaLnBrk="1" hangingPunct="1"/>
@@ -7338,82 +7404,349 @@
               </a:rPr>
               <a:t>:</a:t>
             </a:r>
-            <a:endParaRPr lang="en-US" dirty="0">
-              <a:sym typeface="Symbol" panose="05050102010706020507" pitchFamily="18" charset="2"/>
-            </a:endParaRPr>
-          </a:p>
-        </p:txBody>
-      </p:sp>
-      <p:graphicFrame>
-        <p:nvGraphicFramePr>
-          <p:cNvPr id="7" name="Object 6"/>
-          <p:cNvGraphicFramePr>
-            <a:graphicFrameLocks noChangeAspect="1"/>
-          </p:cNvGraphicFramePr>
-          <p:nvPr/>
-        </p:nvGraphicFramePr>
-        <p:xfrm>
-          <a:off x="1828800" y="4673600"/>
-          <a:ext cx="5037137" cy="1295400"/>
-        </p:xfrm>
-        <a:graphic>
-          <a:graphicData uri="http://schemas.openxmlformats.org/presentationml/2006/ole">
-            <mc:AlternateContent xmlns:mc="http://schemas.openxmlformats.org/markup-compatibility/2006">
-              <mc:Choice xmlns:v="urn:schemas-microsoft-com:vml" Requires="v">
-                <p:oleObj spid="_x0000_s2" name="Equation" r:id="rId1" imgW="1778000" imgH="457200" progId="Equation.3">
-                  <p:embed/>
-                </p:oleObj>
-              </mc:Choice>
-              <mc:Fallback>
-                <p:oleObj name="Equation" r:id="rId1" imgW="1778000" imgH="457200" progId="Equation.3">
-                  <p:embed/>
-                  <p:pic>
-                    <p:nvPicPr>
-                      <p:cNvPr id="0" name="Object 6"/>
-                      <p:cNvPicPr>
-                        <a:picLocks noChangeAspect="1" noChangeArrowheads="1"/>
-                      </p:cNvPicPr>
-                      <p:nvPr/>
-                    </p:nvPicPr>
-                    <p:blipFill>
-                      <a:blip r:embed="rId2">
-                        <a:extLst>
-                          <a:ext uri="{28A0092B-C50C-407E-A947-70E740481C1C}">
-                            <a14:useLocalDpi xmlns:a14="http://schemas.microsoft.com/office/drawing/2010/main" val="0"/>
-                          </a:ext>
-                        </a:extLst>
-                      </a:blip>
-                      <a:srcRect/>
-                      <a:stretch>
-                        <a:fillRect/>
-                      </a:stretch>
-                    </p:blipFill>
-                    <p:spPr bwMode="auto">
-                      <a:xfrm>
-                        <a:off x="1828800" y="4673600"/>
-                        <a:ext cx="5037137" cy="1295400"/>
-                      </a:xfrm>
-                      <a:prstGeom prst="rect">
-                        <a:avLst/>
-                      </a:prstGeom>
-                      <a:noFill/>
-                      <a:extLst>
-                        <a:ext uri="{909E8E84-426E-40DD-AFC4-6F175D3DCCD1}">
-                          <a14:hiddenFill xmlns:a14="http://schemas.microsoft.com/office/drawing/2010/main">
-                            <a:solidFill>
-                              <a:srgbClr val="FFFFFF"/>
-                            </a:solidFill>
-                          </a14:hiddenFill>
-                        </a:ext>
-                      </a:extLst>
-                    </p:spPr>
-                  </p:pic>
-                </p:oleObj>
-              </mc:Fallback>
-            </mc:AlternateContent>
-          </a:graphicData>
-        </a:graphic>
-      </p:graphicFrame>
+          </a:p>
+        </p:txBody>
+      </p:sp>
+      <mc:AlternateContent xmlns:mc="http://schemas.openxmlformats.org/markup-compatibility/2006">
+        <mc:Choice xmlns:a14="http://schemas.microsoft.com/office/drawing/2010/main" Requires="a14">
+          <p:sp>
+            <p:nvSpPr>
+              <p:cNvPr id="7" name="Object 6"/>
+              <p:cNvSpPr txBox="1"/>
+              <p:nvPr/>
+            </p:nvSpPr>
+            <p:spPr bwMode="auto">
+              <a:xfrm>
+                <a:off x="1828800" y="4673600"/>
+                <a:ext cx="5700584" cy="1295400"/>
+              </a:xfrm>
+              <a:prstGeom prst="rect">
+                <a:avLst/>
+              </a:prstGeom>
+              <a:noFill/>
+            </p:spPr>
+            <p:txBody>
+              <a:bodyPr>
+                <a:normAutofit/>
+              </a:bodyPr>
+              <a:lstStyle/>
+              <a:p>
+                <a:pPr/>
+                <a14:m>
+                  <m:oMathPara xmlns:m="http://schemas.openxmlformats.org/officeDocument/2006/math">
+                    <m:oMathParaPr>
+                      <m:jc m:val="left"/>
+                    </m:oMathParaPr>
+                    <m:oMath xmlns:m="http://schemas.openxmlformats.org/officeDocument/2006/math">
+                      <m:func>
+                        <m:funcPr>
+                          <m:ctrlPr>
+                            <a:rPr lang="en-US" sz="2800" i="1">
+                              <a:solidFill>
+                                <a:srgbClr val="000000"/>
+                              </a:solidFill>
+                              <a:latin typeface="Cambria Math" panose="02040503050406030204" pitchFamily="18" charset="0"/>
+                            </a:rPr>
+                          </m:ctrlPr>
+                        </m:funcPr>
+                        <m:fName>
+                          <m:r>
+                            <m:rPr>
+                              <m:sty m:val="p"/>
+                            </m:rPr>
+                            <a:rPr lang="en-US" sz="2800" i="0">
+                              <a:solidFill>
+                                <a:srgbClr val="000000"/>
+                              </a:solidFill>
+                              <a:latin typeface="Cambria Math" panose="02040503050406030204" pitchFamily="18" charset="0"/>
+                            </a:rPr>
+                            <m:t>Pr</m:t>
+                          </m:r>
+                        </m:fName>
+                        <m:e>
+                          <m:r>
+                            <a:rPr lang="en-US" sz="2800" i="1">
+                              <a:solidFill>
+                                <a:srgbClr val="000000"/>
+                              </a:solidFill>
+                              <a:latin typeface="Cambria Math" panose="02040503050406030204" pitchFamily="18" charset="0"/>
+                            </a:rPr>
+                            <m:t>(</m:t>
+                          </m:r>
+                        </m:e>
+                      </m:func>
+                      <m:r>
+                        <a:rPr lang="en-US" sz="2800" i="1">
+                          <a:solidFill>
+                            <a:srgbClr val="000000"/>
+                          </a:solidFill>
+                          <a:latin typeface="Cambria Math" panose="02040503050406030204" pitchFamily="18" charset="0"/>
+                        </a:rPr>
+                        <m:t>11 11)</m:t>
+                      </m:r>
+                      <m:r>
+                        <m:rPr>
+                          <m:aln/>
+                        </m:rPr>
+                        <a:rPr lang="en-US" sz="2800" i="1">
+                          <a:solidFill>
+                            <a:srgbClr val="000000"/>
+                          </a:solidFill>
+                          <a:latin typeface="Cambria Math" panose="02040503050406030204" pitchFamily="18" charset="0"/>
+                        </a:rPr>
+                        <m:t>=</m:t>
+                      </m:r>
+                      <m:r>
+                        <a:rPr lang="en-US" sz="2800" i="1">
+                          <a:solidFill>
+                            <a:srgbClr val="000000"/>
+                          </a:solidFill>
+                          <a:latin typeface="Cambria Math" panose="02040503050406030204" pitchFamily="18" charset="0"/>
+                        </a:rPr>
+                        <m:t>𝜓</m:t>
+                      </m:r>
+                      <m:sSub>
+                        <m:sSubPr>
+                          <m:ctrlPr>
+                            <a:rPr lang="en-US" sz="2800" i="1">
+                              <a:solidFill>
+                                <a:srgbClr val="000000"/>
+                              </a:solidFill>
+                              <a:latin typeface="Cambria Math" panose="02040503050406030204" pitchFamily="18" charset="0"/>
+                            </a:rPr>
+                          </m:ctrlPr>
+                        </m:sSubPr>
+                        <m:e>
+                          <m:r>
+                            <a:rPr lang="en-US" sz="2800" i="1">
+                              <a:solidFill>
+                                <a:srgbClr val="000000"/>
+                              </a:solidFill>
+                              <a:latin typeface="Cambria Math" panose="02040503050406030204" pitchFamily="18" charset="0"/>
+                            </a:rPr>
+                            <m:t>𝑝</m:t>
+                          </m:r>
+                        </m:e>
+                        <m:sub>
+                          <m:r>
+                            <a:rPr lang="en-US" sz="2800" i="1">
+                              <a:solidFill>
+                                <a:srgbClr val="000000"/>
+                              </a:solidFill>
+                              <a:latin typeface="Cambria Math" panose="02040503050406030204" pitchFamily="18" charset="0"/>
+                            </a:rPr>
+                            <m:t>1</m:t>
+                          </m:r>
+                        </m:sub>
+                      </m:sSub>
+                      <m:sSub>
+                        <m:sSubPr>
+                          <m:ctrlPr>
+                            <a:rPr lang="en-US" sz="2800" i="1">
+                              <a:solidFill>
+                                <a:srgbClr val="000000"/>
+                              </a:solidFill>
+                              <a:latin typeface="Cambria Math" panose="02040503050406030204" pitchFamily="18" charset="0"/>
+                            </a:rPr>
+                          </m:ctrlPr>
+                        </m:sSubPr>
+                        <m:e>
+                          <m:r>
+                            <a:rPr lang="en-US" sz="2800" i="1">
+                              <a:solidFill>
+                                <a:srgbClr val="000000"/>
+                              </a:solidFill>
+                              <a:latin typeface="Cambria Math" panose="02040503050406030204" pitchFamily="18" charset="0"/>
+                            </a:rPr>
+                            <m:t>𝑝</m:t>
+                          </m:r>
+                        </m:e>
+                        <m:sub>
+                          <m:r>
+                            <a:rPr lang="en-US" sz="2800" i="1">
+                              <a:solidFill>
+                                <a:srgbClr val="000000"/>
+                              </a:solidFill>
+                              <a:latin typeface="Cambria Math" panose="02040503050406030204" pitchFamily="18" charset="0"/>
+                            </a:rPr>
+                            <m:t>2</m:t>
+                          </m:r>
+                        </m:sub>
+                      </m:sSub>
+                      <m:r>
+                        <a:rPr lang="en-US" sz="2800" i="1">
+                          <a:solidFill>
+                            <a:srgbClr val="000000"/>
+                          </a:solidFill>
+                          <a:latin typeface="Cambria Math" panose="02040503050406030204" pitchFamily="18" charset="0"/>
+                        </a:rPr>
+                        <m:t>(1−</m:t>
+                      </m:r>
+                      <m:sSub>
+                        <m:sSubPr>
+                          <m:ctrlPr>
+                            <a:rPr lang="en-US" sz="2800" i="1">
+                              <a:solidFill>
+                                <a:srgbClr val="000000"/>
+                              </a:solidFill>
+                              <a:latin typeface="Cambria Math" panose="02040503050406030204" pitchFamily="18" charset="0"/>
+                            </a:rPr>
+                          </m:ctrlPr>
+                        </m:sSubPr>
+                        <m:e>
+                          <m:r>
+                            <a:rPr lang="en-US" sz="2800" i="1">
+                              <a:solidFill>
+                                <a:srgbClr val="000000"/>
+                              </a:solidFill>
+                              <a:latin typeface="Cambria Math" panose="02040503050406030204" pitchFamily="18" charset="0"/>
+                            </a:rPr>
+                            <m:t>𝜀</m:t>
+                          </m:r>
+                        </m:e>
+                        <m:sub>
+                          <m:r>
+                            <a:rPr lang="en-US" sz="2800" i="1">
+                              <a:solidFill>
+                                <a:srgbClr val="000000"/>
+                              </a:solidFill>
+                              <a:latin typeface="Cambria Math" panose="02040503050406030204" pitchFamily="18" charset="0"/>
+                            </a:rPr>
+                            <m:t>1</m:t>
+                          </m:r>
+                        </m:sub>
+                      </m:sSub>
+                      <m:r>
+                        <a:rPr lang="en-US" sz="2800" i="1">
+                          <a:solidFill>
+                            <a:srgbClr val="000000"/>
+                          </a:solidFill>
+                          <a:latin typeface="Cambria Math" panose="02040503050406030204" pitchFamily="18" charset="0"/>
+                        </a:rPr>
+                        <m:t>)</m:t>
+                      </m:r>
+                      <m:sSub>
+                        <m:sSubPr>
+                          <m:ctrlPr>
+                            <a:rPr lang="en-US" sz="2800" i="1">
+                              <a:solidFill>
+                                <a:srgbClr val="000000"/>
+                              </a:solidFill>
+                              <a:latin typeface="Cambria Math" panose="02040503050406030204" pitchFamily="18" charset="0"/>
+                            </a:rPr>
+                          </m:ctrlPr>
+                        </m:sSubPr>
+                        <m:e>
+                          <m:r>
+                            <a:rPr lang="en-US" sz="2800" i="1">
+                              <a:solidFill>
+                                <a:srgbClr val="000000"/>
+                              </a:solidFill>
+                              <a:latin typeface="Cambria Math" panose="02040503050406030204" pitchFamily="18" charset="0"/>
+                            </a:rPr>
+                            <m:t>𝑝</m:t>
+                          </m:r>
+                        </m:e>
+                        <m:sub>
+                          <m:r>
+                            <a:rPr lang="en-US" sz="2800" i="1">
+                              <a:solidFill>
+                                <a:srgbClr val="000000"/>
+                              </a:solidFill>
+                              <a:latin typeface="Cambria Math" panose="02040503050406030204" pitchFamily="18" charset="0"/>
+                            </a:rPr>
+                            <m:t>3</m:t>
+                          </m:r>
+                        </m:sub>
+                      </m:sSub>
+                      <m:sSub>
+                        <m:sSubPr>
+                          <m:ctrlPr>
+                            <a:rPr lang="en-US" sz="2800" i="1">
+                              <a:solidFill>
+                                <a:srgbClr val="000000"/>
+                              </a:solidFill>
+                              <a:latin typeface="Cambria Math" panose="02040503050406030204" pitchFamily="18" charset="0"/>
+                            </a:rPr>
+                          </m:ctrlPr>
+                        </m:sSubPr>
+                        <m:e>
+                          <m:r>
+                            <a:rPr lang="en-US" sz="2800" i="1">
+                              <a:solidFill>
+                                <a:srgbClr val="000000"/>
+                              </a:solidFill>
+                              <a:latin typeface="Cambria Math" panose="02040503050406030204" pitchFamily="18" charset="0"/>
+                            </a:rPr>
+                            <m:t>𝑝</m:t>
+                          </m:r>
+                        </m:e>
+                        <m:sub>
+                          <m:r>
+                            <a:rPr lang="en-US" sz="2800" i="1">
+                              <a:solidFill>
+                                <a:srgbClr val="000000"/>
+                              </a:solidFill>
+                              <a:latin typeface="Cambria Math" panose="02040503050406030204" pitchFamily="18" charset="0"/>
+                            </a:rPr>
+                            <m:t>4</m:t>
+                          </m:r>
+                        </m:sub>
+                      </m:sSub>
+                    </m:oMath>
+                  </m:oMathPara>
+                </a14:m>
+                <a:br>
+                  <a:rPr lang="en-US" sz="2800" dirty="0">
+                    <a:solidFill>
+                      <a:srgbClr val="000000"/>
+                    </a:solidFill>
+                  </a:rPr>
+                </a:br>
+                <a:endParaRPr lang="en-US" sz="2800" dirty="0"/>
+              </a:p>
+            </p:txBody>
+          </p:sp>
+        </mc:Choice>
+        <mc:Fallback>
+          <p:sp>
+            <p:nvSpPr>
+              <p:cNvPr id="7" name="Object 6"/>
+              <p:cNvSpPr txBox="1">
+                <a:spLocks noRot="1" noChangeAspect="1" noMove="1" noResize="1" noEditPoints="1" noAdjustHandles="1" noChangeArrowheads="1" noChangeShapeType="1" noTextEdit="1"/>
+              </p:cNvSpPr>
+              <p:nvPr/>
+            </p:nvSpPr>
+            <p:spPr bwMode="auto">
+              <a:xfrm>
+                <a:off x="1828800" y="4673600"/>
+                <a:ext cx="5700584" cy="1295400"/>
+              </a:xfrm>
+              <a:prstGeom prst="rect">
+                <a:avLst/>
+              </a:prstGeom>
+              <a:blipFill>
+                <a:blip r:embed="rId3"/>
+                <a:stretch>
+                  <a:fillRect/>
+                </a:stretch>
+              </a:blipFill>
+            </p:spPr>
+            <p:txBody>
+              <a:bodyPr/>
+              <a:lstStyle/>
+              <a:p>
+                <a:r>
+                  <a:rPr lang="en-US">
+                    <a:noFill/>
+                  </a:rPr>
+                  <a:t> </a:t>
+                </a:r>
+              </a:p>
+            </p:txBody>
+          </p:sp>
+        </mc:Fallback>
+      </mc:AlternateContent>
     </p:spTree>
   </p:cSld>
   <p:clrMapOvr>
@@ -7466,13 +7799,8 @@
             </a:br>
             <a:r>
               <a:rPr lang="zh-CN" altLang="en-US" dirty="0"/>
-              <a:t>概率</a:t>
-            </a:r>
-            <a:r>
-              <a:rPr lang="zh-CN" altLang="en-US" dirty="0"/>
-              <a:t>模型</a:t>
-            </a:r>
-            <a:endParaRPr lang="zh-CN" altLang="en-US" dirty="0"/>
+              <a:t>概率模型</a:t>
+            </a:r>
           </a:p>
         </p:txBody>
       </p:sp>
@@ -7510,9 +7838,6 @@
               </a:rPr>
               <a:t>:</a:t>
             </a:r>
-            <a:endParaRPr lang="en-US" dirty="0">
-              <a:sym typeface="Symbol" panose="05050102010706020507" pitchFamily="18" charset="2"/>
-            </a:endParaRPr>
           </a:p>
         </p:txBody>
       </p:sp>
@@ -7524,7 +7849,7 @@
         </p:nvSpPr>
         <p:spPr>
           <a:xfrm>
-            <a:off x="762000" y="3048000"/>
+            <a:off x="762000" y="3286902"/>
             <a:ext cx="8382000" cy="2362200"/>
           </a:xfrm>
           <a:prstGeom prst="rect">
@@ -7551,10 +7876,15 @@
               <a:buChar char="§"/>
             </a:pPr>
             <a:r>
-              <a:rPr lang="en-US" sz="2000" dirty="0"/>
+              <a:rPr lang="en-US" sz="2000" dirty="0">
+                <a:solidFill>
+                  <a:schemeClr val="accent5">
+                    <a:lumMod val="75000"/>
+                  </a:schemeClr>
+                </a:solidFill>
+              </a:rPr>
               <a:t>Occupied and detected on first, not detected on second and then unoccupied (extinct)</a:t>
             </a:r>
-            <a:endParaRPr lang="en-US" sz="2000" dirty="0"/>
           </a:p>
           <a:p>
             <a:pPr algn="ctr"/>
@@ -7562,7 +7892,6 @@
               <a:rPr lang="en-US" sz="2000" dirty="0"/>
               <a:t>OR</a:t>
             </a:r>
-            <a:endParaRPr lang="en-US" sz="2000" dirty="0"/>
           </a:p>
           <a:p>
             <a:pPr marL="339725" indent="-339725">
@@ -7576,10 +7905,13 @@
               <a:buChar char="§"/>
             </a:pPr>
             <a:r>
-              <a:rPr lang="en-US" sz="2000" dirty="0"/>
+              <a:rPr lang="en-US" sz="2000" dirty="0">
+                <a:solidFill>
+                  <a:srgbClr val="CC00FF"/>
+                </a:solidFill>
+              </a:rPr>
               <a:t>Occupied and detected on first, not detected on second and remained occupied but undetected on third and fourth.</a:t>
             </a:r>
-            <a:endParaRPr lang="en-US" sz="2000" dirty="0"/>
           </a:p>
           <a:p>
             <a:pPr marL="339725" indent="-339725">
@@ -7606,26 +7938,55 @@
               <a:buChar char="§"/>
             </a:pPr>
             <a:r>
-              <a:rPr lang="en-US" sz="2000" dirty="0"/>
+              <a:rPr lang="en-US" sz="2000" dirty="0">
+                <a:solidFill>
+                  <a:schemeClr val="accent5">
+                    <a:lumMod val="75000"/>
+                  </a:schemeClr>
+                </a:solidFill>
+              </a:rPr>
               <a:t>在第一个时段内被</a:t>
             </a:r>
             <a:r>
-              <a:rPr lang="zh-CN" altLang="en-US" sz="2000" dirty="0"/>
+              <a:rPr lang="zh-CN" altLang="en-US" sz="2000" dirty="0">
+                <a:solidFill>
+                  <a:schemeClr val="accent5">
+                    <a:lumMod val="75000"/>
+                  </a:schemeClr>
+                </a:solidFill>
+              </a:rPr>
               <a:t>占用</a:t>
             </a:r>
             <a:r>
-              <a:rPr lang="en-US" sz="2000" dirty="0"/>
+              <a:rPr lang="en-US" sz="2000" dirty="0">
+                <a:solidFill>
+                  <a:schemeClr val="accent5">
+                    <a:lumMod val="75000"/>
+                  </a:schemeClr>
+                </a:solidFill>
+              </a:rPr>
               <a:t>且被检测到，第二个时段未被检测到，然后变为</a:t>
             </a:r>
             <a:r>
-              <a:rPr lang="zh-CN" altLang="en-US" sz="2000" dirty="0"/>
+              <a:rPr lang="zh-CN" altLang="en-US" sz="2000" dirty="0">
+                <a:solidFill>
+                  <a:schemeClr val="accent5">
+                    <a:lumMod val="75000"/>
+                  </a:schemeClr>
+                </a:solidFill>
+              </a:rPr>
               <a:t>未被占用</a:t>
             </a:r>
             <a:r>
-              <a:rPr lang="en-US" sz="2000" dirty="0"/>
+              <a:rPr lang="en-US" sz="2000" dirty="0">
+                <a:solidFill>
+                  <a:schemeClr val="accent5">
+                    <a:lumMod val="75000"/>
+                  </a:schemeClr>
+                </a:solidFill>
+              </a:rPr>
               <a:t>（灭绝）。</a:t>
             </a:r>
-            <a:endParaRPr lang="en-US" sz="2000" dirty="0"/>
           </a:p>
           <a:p>
             <a:pPr indent="0" algn="ctr">
@@ -7642,7 +8003,6 @@
               <a:rPr lang="en-US" sz="2000" dirty="0"/>
               <a:t>或者</a:t>
             </a:r>
-            <a:endParaRPr lang="en-US" sz="2000" dirty="0"/>
           </a:p>
           <a:p>
             <a:pPr marL="339725" indent="-339725">
@@ -7656,122 +8016,593 @@
               <a:buChar char="§"/>
             </a:pPr>
             <a:r>
-              <a:rPr lang="en-US" sz="2000" dirty="0"/>
+              <a:rPr lang="en-US" sz="2000" dirty="0">
+                <a:solidFill>
+                  <a:srgbClr val="CC00FF"/>
+                </a:solidFill>
+              </a:rPr>
               <a:t>在第一个时段内被</a:t>
             </a:r>
             <a:r>
-              <a:rPr lang="zh-CN" altLang="en-US" sz="2000" dirty="0"/>
+              <a:rPr lang="zh-CN" altLang="en-US" sz="2000" dirty="0">
+                <a:solidFill>
+                  <a:srgbClr val="CC00FF"/>
+                </a:solidFill>
+              </a:rPr>
               <a:t>占用</a:t>
             </a:r>
             <a:r>
-              <a:rPr lang="en-US" sz="2000" dirty="0"/>
+              <a:rPr lang="en-US" sz="2000" dirty="0">
+                <a:solidFill>
+                  <a:srgbClr val="CC00FF"/>
+                </a:solidFill>
+              </a:rPr>
               <a:t>且被检测到，第二个时段未被检测到，但在第三和第四个时段仍然被</a:t>
             </a:r>
             <a:r>
-              <a:rPr lang="zh-CN" altLang="en-US" sz="2000" dirty="0"/>
+              <a:rPr lang="zh-CN" altLang="en-US" sz="2000" dirty="0">
+                <a:solidFill>
+                  <a:srgbClr val="CC00FF"/>
+                </a:solidFill>
+              </a:rPr>
               <a:t>占用</a:t>
             </a:r>
             <a:r>
-              <a:rPr lang="en-US" sz="2000" dirty="0"/>
+              <a:rPr lang="en-US" sz="2000" dirty="0">
+                <a:solidFill>
+                  <a:srgbClr val="CC00FF"/>
+                </a:solidFill>
+              </a:rPr>
               <a:t>，只是未被检测到。</a:t>
             </a:r>
-            <a:endParaRPr lang="en-US" sz="2000" dirty="0"/>
-          </a:p>
-        </p:txBody>
-      </p:sp>
-      <p:graphicFrame>
-        <p:nvGraphicFramePr>
-          <p:cNvPr id="90116" name="Object 4"/>
-          <p:cNvGraphicFramePr>
-            <a:graphicFrameLocks noChangeAspect="1"/>
-          </p:cNvGraphicFramePr>
-          <p:nvPr/>
-        </p:nvGraphicFramePr>
-        <p:xfrm>
-          <a:off x="838200" y="2209800"/>
-          <a:ext cx="7893050" cy="490537"/>
-        </p:xfrm>
-        <a:graphic>
-          <a:graphicData uri="http://schemas.openxmlformats.org/presentationml/2006/ole">
-            <mc:AlternateContent xmlns:mc="http://schemas.openxmlformats.org/markup-compatibility/2006">
-              <mc:Choice xmlns:v="urn:schemas-microsoft-com:vml" Requires="v">
-                <p:oleObj spid="_x0000_s2" name="Equation" r:id="rId1" imgW="3683000" imgH="228600" progId="Equation.3">
-                  <p:embed/>
-                </p:oleObj>
-              </mc:Choice>
-              <mc:Fallback>
-                <p:oleObj name="Equation" r:id="rId1" imgW="3683000" imgH="228600" progId="Equation.3">
-                  <p:embed/>
-                  <p:pic>
-                    <p:nvPicPr>
-                      <p:cNvPr id="0" name="Object 4"/>
-                      <p:cNvPicPr>
-                        <a:picLocks noChangeAspect="1" noChangeArrowheads="1"/>
-                      </p:cNvPicPr>
-                      <p:nvPr/>
-                    </p:nvPicPr>
-                    <p:blipFill>
-                      <a:blip r:embed="rId2">
-                        <a:extLst>
-                          <a:ext uri="{28A0092B-C50C-407E-A947-70E740481C1C}">
-                            <a14:useLocalDpi xmlns:a14="http://schemas.microsoft.com/office/drawing/2010/main" val="0"/>
-                          </a:ext>
-                        </a:extLst>
-                      </a:blip>
-                      <a:srcRect/>
-                      <a:stretch>
-                        <a:fillRect/>
-                      </a:stretch>
-                    </p:blipFill>
-                    <p:spPr bwMode="auto">
-                      <a:xfrm>
-                        <a:off x="838200" y="2209800"/>
-                        <a:ext cx="7893050" cy="490537"/>
-                      </a:xfrm>
-                      <a:prstGeom prst="rect">
-                        <a:avLst/>
-                      </a:prstGeom>
-                      <a:noFill/>
-                      <a:ln>
-                        <a:noFill/>
-                      </a:ln>
-                      <a:effectLst/>
-                      <a:extLst>
-                        <a:ext uri="{909E8E84-426E-40DD-AFC4-6F175D3DCCD1}">
-                          <a14:hiddenFill xmlns:a14="http://schemas.microsoft.com/office/drawing/2010/main">
-                            <a:solidFill>
-                              <a:schemeClr val="accent1"/>
-                            </a:solidFill>
-                          </a14:hiddenFill>
-                        </a:ext>
-                        <a:ext uri="{91240B29-F687-4F45-9708-019B960494DF}">
-                          <a14:hiddenLine xmlns:a14="http://schemas.microsoft.com/office/drawing/2010/main" w="9525">
-                            <a:solidFill>
-                              <a:schemeClr val="tx1"/>
-                            </a:solidFill>
-                            <a:miter lim="800000"/>
-                            <a:headEnd/>
-                            <a:tailEnd/>
-                          </a14:hiddenLine>
-                        </a:ext>
-                        <a:ext uri="{AF507438-7753-43E0-B8FC-AC1667EBCBE1}">
-                          <a14:hiddenEffects xmlns:a14="http://schemas.microsoft.com/office/drawing/2010/main">
-                            <a:effectLst>
-                              <a:outerShdw dist="35921" dir="2700000" algn="ctr" rotWithShape="0">
-                                <a:schemeClr val="bg2"/>
-                              </a:outerShdw>
-                            </a:effectLst>
-                          </a14:hiddenEffects>
-                        </a:ext>
-                      </a:extLst>
-                    </p:spPr>
-                  </p:pic>
-                </p:oleObj>
-              </mc:Fallback>
-            </mc:AlternateContent>
-          </a:graphicData>
-        </a:graphic>
-      </p:graphicFrame>
+          </a:p>
+        </p:txBody>
+      </p:sp>
+      <mc:AlternateContent xmlns:mc="http://schemas.openxmlformats.org/markup-compatibility/2006">
+        <mc:Choice xmlns:a14="http://schemas.microsoft.com/office/drawing/2010/main" Requires="a14">
+          <p:sp>
+            <p:nvSpPr>
+              <p:cNvPr id="90116" name="Object 4"/>
+              <p:cNvSpPr txBox="1"/>
+              <p:nvPr/>
+            </p:nvSpPr>
+            <p:spPr bwMode="auto">
+              <a:xfrm>
+                <a:off x="838200" y="2209800"/>
+                <a:ext cx="7893050" cy="1143001"/>
+              </a:xfrm>
+              <a:prstGeom prst="rect">
+                <a:avLst/>
+              </a:prstGeom>
+              <a:noFill/>
+              <a:ln>
+                <a:noFill/>
+              </a:ln>
+              <a:effectLst/>
+            </p:spPr>
+            <p:txBody>
+              <a:bodyPr>
+                <a:normAutofit/>
+              </a:bodyPr>
+              <a:lstStyle/>
+              <a:p>
+                <a:pPr/>
+                <a14:m>
+                  <m:oMathPara xmlns:m="http://schemas.openxmlformats.org/officeDocument/2006/math">
+                    <m:oMathParaPr>
+                      <m:jc m:val="left"/>
+                    </m:oMathParaPr>
+                    <m:oMath xmlns:m="http://schemas.openxmlformats.org/officeDocument/2006/math">
+                      <m:func>
+                        <m:funcPr>
+                          <m:ctrlPr>
+                            <a:rPr lang="en-US" sz="2400" i="1" smtClean="0">
+                              <a:solidFill>
+                                <a:srgbClr val="000000"/>
+                              </a:solidFill>
+                              <a:latin typeface="Cambria Math" panose="02040503050406030204" pitchFamily="18" charset="0"/>
+                            </a:rPr>
+                          </m:ctrlPr>
+                        </m:funcPr>
+                        <m:fName>
+                          <m:r>
+                            <m:rPr>
+                              <m:sty m:val="p"/>
+                            </m:rPr>
+                            <a:rPr lang="en-US" sz="2400" i="0">
+                              <a:solidFill>
+                                <a:srgbClr val="000000"/>
+                              </a:solidFill>
+                              <a:latin typeface="Cambria Math" panose="02040503050406030204" pitchFamily="18" charset="0"/>
+                            </a:rPr>
+                            <m:t>Pr</m:t>
+                          </m:r>
+                        </m:fName>
+                        <m:e>
+                          <m:r>
+                            <a:rPr lang="en-US" sz="2400" i="1">
+                              <a:solidFill>
+                                <a:srgbClr val="000000"/>
+                              </a:solidFill>
+                              <a:latin typeface="Cambria Math" panose="02040503050406030204" pitchFamily="18" charset="0"/>
+                            </a:rPr>
+                            <m:t>(</m:t>
+                          </m:r>
+                        </m:e>
+                      </m:func>
+                      <m:r>
+                        <a:rPr lang="en-US" sz="2400" i="1">
+                          <a:solidFill>
+                            <a:srgbClr val="000000"/>
+                          </a:solidFill>
+                          <a:latin typeface="Cambria Math" panose="02040503050406030204" pitchFamily="18" charset="0"/>
+                        </a:rPr>
+                        <m:t>10 00)=</m:t>
+                      </m:r>
+                      <m:r>
+                        <a:rPr lang="en-US" sz="2400" i="1" smtClean="0">
+                          <a:solidFill>
+                            <a:schemeClr val="accent5">
+                              <a:lumMod val="75000"/>
+                            </a:schemeClr>
+                          </a:solidFill>
+                          <a:latin typeface="Cambria Math" panose="02040503050406030204" pitchFamily="18" charset="0"/>
+                        </a:rPr>
+                        <m:t>𝜓</m:t>
+                      </m:r>
+                      <m:sSub>
+                        <m:sSubPr>
+                          <m:ctrlPr>
+                            <a:rPr lang="en-US" sz="2400" i="1">
+                              <a:solidFill>
+                                <a:schemeClr val="accent5">
+                                  <a:lumMod val="75000"/>
+                                </a:schemeClr>
+                              </a:solidFill>
+                              <a:latin typeface="Cambria Math" panose="02040503050406030204" pitchFamily="18" charset="0"/>
+                            </a:rPr>
+                          </m:ctrlPr>
+                        </m:sSubPr>
+                        <m:e>
+                          <m:r>
+                            <a:rPr lang="en-US" sz="2400" i="1">
+                              <a:solidFill>
+                                <a:schemeClr val="accent5">
+                                  <a:lumMod val="75000"/>
+                                </a:schemeClr>
+                              </a:solidFill>
+                              <a:latin typeface="Cambria Math" panose="02040503050406030204" pitchFamily="18" charset="0"/>
+                            </a:rPr>
+                            <m:t>𝑝</m:t>
+                          </m:r>
+                        </m:e>
+                        <m:sub>
+                          <m:r>
+                            <a:rPr lang="en-US" sz="2400" i="1">
+                              <a:solidFill>
+                                <a:schemeClr val="accent5">
+                                  <a:lumMod val="75000"/>
+                                </a:schemeClr>
+                              </a:solidFill>
+                              <a:latin typeface="Cambria Math" panose="02040503050406030204" pitchFamily="18" charset="0"/>
+                            </a:rPr>
+                            <m:t>1</m:t>
+                          </m:r>
+                        </m:sub>
+                      </m:sSub>
+                      <m:d>
+                        <m:dPr>
+                          <m:ctrlPr>
+                            <a:rPr lang="en-US" sz="2400" i="1">
+                              <a:solidFill>
+                                <a:schemeClr val="accent5">
+                                  <a:lumMod val="75000"/>
+                                </a:schemeClr>
+                              </a:solidFill>
+                              <a:latin typeface="Cambria Math" panose="02040503050406030204" pitchFamily="18" charset="0"/>
+                            </a:rPr>
+                          </m:ctrlPr>
+                        </m:dPr>
+                        <m:e>
+                          <m:r>
+                            <a:rPr lang="en-US" sz="2400" i="1">
+                              <a:solidFill>
+                                <a:schemeClr val="accent5">
+                                  <a:lumMod val="75000"/>
+                                </a:schemeClr>
+                              </a:solidFill>
+                              <a:latin typeface="Cambria Math" panose="02040503050406030204" pitchFamily="18" charset="0"/>
+                            </a:rPr>
+                            <m:t>1−</m:t>
+                          </m:r>
+                          <m:sSub>
+                            <m:sSubPr>
+                              <m:ctrlPr>
+                                <a:rPr lang="en-US" sz="2400" i="1">
+                                  <a:solidFill>
+                                    <a:schemeClr val="accent5">
+                                      <a:lumMod val="75000"/>
+                                    </a:schemeClr>
+                                  </a:solidFill>
+                                  <a:latin typeface="Cambria Math" panose="02040503050406030204" pitchFamily="18" charset="0"/>
+                                </a:rPr>
+                              </m:ctrlPr>
+                            </m:sSubPr>
+                            <m:e>
+                              <m:r>
+                                <a:rPr lang="en-US" sz="2400" i="1">
+                                  <a:solidFill>
+                                    <a:schemeClr val="accent5">
+                                      <a:lumMod val="75000"/>
+                                    </a:schemeClr>
+                                  </a:solidFill>
+                                  <a:latin typeface="Cambria Math" panose="02040503050406030204" pitchFamily="18" charset="0"/>
+                                </a:rPr>
+                                <m:t>𝑝</m:t>
+                              </m:r>
+                            </m:e>
+                            <m:sub>
+                              <m:r>
+                                <a:rPr lang="en-US" sz="2400" i="1">
+                                  <a:solidFill>
+                                    <a:schemeClr val="accent5">
+                                      <a:lumMod val="75000"/>
+                                    </a:schemeClr>
+                                  </a:solidFill>
+                                  <a:latin typeface="Cambria Math" panose="02040503050406030204" pitchFamily="18" charset="0"/>
+                                </a:rPr>
+                                <m:t>2</m:t>
+                              </m:r>
+                            </m:sub>
+                          </m:sSub>
+                        </m:e>
+                      </m:d>
+                      <m:d>
+                        <m:dPr>
+                          <m:ctrlPr>
+                            <a:rPr lang="en-US" sz="2400" i="1">
+                              <a:solidFill>
+                                <a:schemeClr val="accent5">
+                                  <a:lumMod val="75000"/>
+                                </a:schemeClr>
+                              </a:solidFill>
+                              <a:latin typeface="Cambria Math" panose="02040503050406030204" pitchFamily="18" charset="0"/>
+                            </a:rPr>
+                          </m:ctrlPr>
+                        </m:dPr>
+                        <m:e>
+                          <m:sSub>
+                            <m:sSubPr>
+                              <m:ctrlPr>
+                                <a:rPr lang="en-US" sz="2400" i="1">
+                                  <a:solidFill>
+                                    <a:schemeClr val="accent5">
+                                      <a:lumMod val="75000"/>
+                                    </a:schemeClr>
+                                  </a:solidFill>
+                                  <a:latin typeface="Cambria Math" panose="02040503050406030204" pitchFamily="18" charset="0"/>
+                                </a:rPr>
+                              </m:ctrlPr>
+                            </m:sSubPr>
+                            <m:e>
+                              <m:r>
+                                <a:rPr lang="en-US" sz="2400" i="1">
+                                  <a:solidFill>
+                                    <a:schemeClr val="accent5">
+                                      <a:lumMod val="75000"/>
+                                    </a:schemeClr>
+                                  </a:solidFill>
+                                  <a:latin typeface="Cambria Math" panose="02040503050406030204" pitchFamily="18" charset="0"/>
+                                </a:rPr>
+                                <m:t>𝜀</m:t>
+                              </m:r>
+                            </m:e>
+                            <m:sub>
+                              <m:r>
+                                <a:rPr lang="en-US" sz="2400" i="1">
+                                  <a:solidFill>
+                                    <a:schemeClr val="accent5">
+                                      <a:lumMod val="75000"/>
+                                    </a:schemeClr>
+                                  </a:solidFill>
+                                  <a:latin typeface="Cambria Math" panose="02040503050406030204" pitchFamily="18" charset="0"/>
+                                </a:rPr>
+                                <m:t>1</m:t>
+                              </m:r>
+                            </m:sub>
+                          </m:sSub>
+                        </m:e>
+                      </m:d>
+                      <m:r>
+                        <a:rPr lang="en-US" sz="2400" i="1">
+                          <a:solidFill>
+                            <a:schemeClr val="accent5">
+                              <a:lumMod val="75000"/>
+                            </a:schemeClr>
+                          </a:solidFill>
+                          <a:latin typeface="Cambria Math" panose="02040503050406030204" pitchFamily="18" charset="0"/>
+                        </a:rPr>
+                        <m:t>+</m:t>
+                      </m:r>
+                    </m:oMath>
+                  </m:oMathPara>
+                </a14:m>
+                <a:endParaRPr lang="en-US" sz="2400" i="1" dirty="0">
+                  <a:solidFill>
+                    <a:schemeClr val="accent5">
+                      <a:lumMod val="75000"/>
+                    </a:schemeClr>
+                  </a:solidFill>
+                  <a:latin typeface="Cambria Math" panose="02040503050406030204" pitchFamily="18" charset="0"/>
+                </a:endParaRPr>
+              </a:p>
+              <a:p>
+                <a:pPr/>
+                <a14:m>
+                  <m:oMathPara xmlns:m="http://schemas.openxmlformats.org/officeDocument/2006/math">
+                    <m:oMathParaPr>
+                      <m:jc m:val="left"/>
+                    </m:oMathParaPr>
+                    <m:oMath xmlns:m="http://schemas.openxmlformats.org/officeDocument/2006/math">
+                      <m:r>
+                        <a:rPr lang="en-US" sz="2400" b="0" i="1" smtClean="0">
+                          <a:solidFill>
+                            <a:srgbClr val="000000"/>
+                          </a:solidFill>
+                          <a:latin typeface="Cambria Math" panose="02040503050406030204" pitchFamily="18" charset="0"/>
+                        </a:rPr>
+                        <m:t>                           </m:t>
+                      </m:r>
+                      <m:r>
+                        <a:rPr lang="en-US" sz="2400" i="1" smtClean="0">
+                          <a:solidFill>
+                            <a:srgbClr val="CC00FF"/>
+                          </a:solidFill>
+                          <a:latin typeface="Cambria Math" panose="02040503050406030204" pitchFamily="18" charset="0"/>
+                        </a:rPr>
+                        <m:t>𝜓</m:t>
+                      </m:r>
+                      <m:sSub>
+                        <m:sSubPr>
+                          <m:ctrlPr>
+                            <a:rPr lang="en-US" sz="2400" i="1">
+                              <a:solidFill>
+                                <a:srgbClr val="CC00FF"/>
+                              </a:solidFill>
+                              <a:latin typeface="Cambria Math" panose="02040503050406030204" pitchFamily="18" charset="0"/>
+                            </a:rPr>
+                          </m:ctrlPr>
+                        </m:sSubPr>
+                        <m:e>
+                          <m:r>
+                            <a:rPr lang="en-US" sz="2400" i="1">
+                              <a:solidFill>
+                                <a:srgbClr val="CC00FF"/>
+                              </a:solidFill>
+                              <a:latin typeface="Cambria Math" panose="02040503050406030204" pitchFamily="18" charset="0"/>
+                            </a:rPr>
+                            <m:t>𝑝</m:t>
+                          </m:r>
+                        </m:e>
+                        <m:sub>
+                          <m:r>
+                            <a:rPr lang="en-US" sz="2400" i="1">
+                              <a:solidFill>
+                                <a:srgbClr val="CC00FF"/>
+                              </a:solidFill>
+                              <a:latin typeface="Cambria Math" panose="02040503050406030204" pitchFamily="18" charset="0"/>
+                            </a:rPr>
+                            <m:t>1</m:t>
+                          </m:r>
+                        </m:sub>
+                      </m:sSub>
+                      <m:r>
+                        <a:rPr lang="en-US" sz="2400" i="1">
+                          <a:solidFill>
+                            <a:srgbClr val="CC00FF"/>
+                          </a:solidFill>
+                          <a:latin typeface="Cambria Math" panose="02040503050406030204" pitchFamily="18" charset="0"/>
+                        </a:rPr>
+                        <m:t>(1−</m:t>
+                      </m:r>
+                      <m:sSub>
+                        <m:sSubPr>
+                          <m:ctrlPr>
+                            <a:rPr lang="en-US" sz="2400" i="1">
+                              <a:solidFill>
+                                <a:srgbClr val="CC00FF"/>
+                              </a:solidFill>
+                              <a:latin typeface="Cambria Math" panose="02040503050406030204" pitchFamily="18" charset="0"/>
+                            </a:rPr>
+                          </m:ctrlPr>
+                        </m:sSubPr>
+                        <m:e>
+                          <m:r>
+                            <a:rPr lang="en-US" sz="2400" i="1">
+                              <a:solidFill>
+                                <a:srgbClr val="CC00FF"/>
+                              </a:solidFill>
+                              <a:latin typeface="Cambria Math" panose="02040503050406030204" pitchFamily="18" charset="0"/>
+                            </a:rPr>
+                            <m:t>𝑝</m:t>
+                          </m:r>
+                        </m:e>
+                        <m:sub>
+                          <m:r>
+                            <a:rPr lang="en-US" sz="2400" i="1">
+                              <a:solidFill>
+                                <a:srgbClr val="CC00FF"/>
+                              </a:solidFill>
+                              <a:latin typeface="Cambria Math" panose="02040503050406030204" pitchFamily="18" charset="0"/>
+                            </a:rPr>
+                            <m:t>2</m:t>
+                          </m:r>
+                        </m:sub>
+                      </m:sSub>
+                      <m:r>
+                        <a:rPr lang="en-US" sz="2400" i="1">
+                          <a:solidFill>
+                            <a:srgbClr val="CC00FF"/>
+                          </a:solidFill>
+                          <a:latin typeface="Cambria Math" panose="02040503050406030204" pitchFamily="18" charset="0"/>
+                        </a:rPr>
+                        <m:t>)(1−</m:t>
+                      </m:r>
+                      <m:r>
+                        <a:rPr lang="en-US" sz="2400" i="1">
+                          <a:solidFill>
+                            <a:srgbClr val="CC00FF"/>
+                          </a:solidFill>
+                          <a:latin typeface="Cambria Math" panose="02040503050406030204" pitchFamily="18" charset="0"/>
+                        </a:rPr>
+                        <m:t>𝜀</m:t>
+                      </m:r>
+                      <m:r>
+                        <a:rPr lang="en-US" sz="2400" i="1">
+                          <a:solidFill>
+                            <a:srgbClr val="CC00FF"/>
+                          </a:solidFill>
+                          <a:latin typeface="Cambria Math" panose="02040503050406030204" pitchFamily="18" charset="0"/>
+                        </a:rPr>
+                        <m:t>)(1−</m:t>
+                      </m:r>
+                      <m:sSub>
+                        <m:sSubPr>
+                          <m:ctrlPr>
+                            <a:rPr lang="en-US" sz="2400" i="1">
+                              <a:solidFill>
+                                <a:srgbClr val="CC00FF"/>
+                              </a:solidFill>
+                              <a:latin typeface="Cambria Math" panose="02040503050406030204" pitchFamily="18" charset="0"/>
+                            </a:rPr>
+                          </m:ctrlPr>
+                        </m:sSubPr>
+                        <m:e>
+                          <m:r>
+                            <a:rPr lang="en-US" sz="2400" i="1">
+                              <a:solidFill>
+                                <a:srgbClr val="CC00FF"/>
+                              </a:solidFill>
+                              <a:latin typeface="Cambria Math" panose="02040503050406030204" pitchFamily="18" charset="0"/>
+                            </a:rPr>
+                            <m:t>𝑝</m:t>
+                          </m:r>
+                        </m:e>
+                        <m:sub>
+                          <m:r>
+                            <a:rPr lang="en-US" sz="2400" i="1">
+                              <a:solidFill>
+                                <a:srgbClr val="CC00FF"/>
+                              </a:solidFill>
+                              <a:latin typeface="Cambria Math" panose="02040503050406030204" pitchFamily="18" charset="0"/>
+                            </a:rPr>
+                            <m:t>3</m:t>
+                          </m:r>
+                        </m:sub>
+                      </m:sSub>
+                      <m:r>
+                        <a:rPr lang="en-US" sz="2400" i="1">
+                          <a:solidFill>
+                            <a:srgbClr val="CC00FF"/>
+                          </a:solidFill>
+                          <a:latin typeface="Cambria Math" panose="02040503050406030204" pitchFamily="18" charset="0"/>
+                        </a:rPr>
+                        <m:t>)(1−</m:t>
+                      </m:r>
+                      <m:sSub>
+                        <m:sSubPr>
+                          <m:ctrlPr>
+                            <a:rPr lang="en-US" sz="2400" i="1">
+                              <a:solidFill>
+                                <a:srgbClr val="CC00FF"/>
+                              </a:solidFill>
+                              <a:latin typeface="Cambria Math" panose="02040503050406030204" pitchFamily="18" charset="0"/>
+                            </a:rPr>
+                          </m:ctrlPr>
+                        </m:sSubPr>
+                        <m:e>
+                          <m:r>
+                            <a:rPr lang="en-US" sz="2400" i="1">
+                              <a:solidFill>
+                                <a:srgbClr val="CC00FF"/>
+                              </a:solidFill>
+                              <a:latin typeface="Cambria Math" panose="02040503050406030204" pitchFamily="18" charset="0"/>
+                            </a:rPr>
+                            <m:t>𝑝</m:t>
+                          </m:r>
+                        </m:e>
+                        <m:sub>
+                          <m:r>
+                            <a:rPr lang="en-US" sz="2400" i="1">
+                              <a:solidFill>
+                                <a:srgbClr val="CC00FF"/>
+                              </a:solidFill>
+                              <a:latin typeface="Cambria Math" panose="02040503050406030204" pitchFamily="18" charset="0"/>
+                            </a:rPr>
+                            <m:t>4</m:t>
+                          </m:r>
+                        </m:sub>
+                      </m:sSub>
+                      <m:r>
+                        <a:rPr lang="en-US" sz="2400" i="1">
+                          <a:solidFill>
+                            <a:srgbClr val="CC00FF"/>
+                          </a:solidFill>
+                          <a:latin typeface="Cambria Math" panose="02040503050406030204" pitchFamily="18" charset="0"/>
+                        </a:rPr>
+                        <m:t>)</m:t>
+                      </m:r>
+                    </m:oMath>
+                  </m:oMathPara>
+                </a14:m>
+                <a:endParaRPr lang="en-US" sz="2400" dirty="0"/>
+              </a:p>
+            </p:txBody>
+          </p:sp>
+        </mc:Choice>
+        <mc:Fallback>
+          <p:sp>
+            <p:nvSpPr>
+              <p:cNvPr id="90116" name="Object 4"/>
+              <p:cNvSpPr txBox="1">
+                <a:spLocks noRot="1" noChangeAspect="1" noMove="1" noResize="1" noEditPoints="1" noAdjustHandles="1" noChangeArrowheads="1" noChangeShapeType="1" noTextEdit="1"/>
+              </p:cNvSpPr>
+              <p:nvPr/>
+            </p:nvSpPr>
+            <p:spPr bwMode="auto">
+              <a:xfrm>
+                <a:off x="838200" y="2209800"/>
+                <a:ext cx="7893050" cy="1143001"/>
+              </a:xfrm>
+              <a:prstGeom prst="rect">
+                <a:avLst/>
+              </a:prstGeom>
+              <a:blipFill>
+                <a:blip r:embed="rId3"/>
+                <a:stretch>
+                  <a:fillRect l="-232"/>
+                </a:stretch>
+              </a:blipFill>
+              <a:ln>
+                <a:noFill/>
+              </a:ln>
+              <a:effectLst/>
+            </p:spPr>
+            <p:txBody>
+              <a:bodyPr/>
+              <a:lstStyle/>
+              <a:p>
+                <a:r>
+                  <a:rPr lang="en-US">
+                    <a:noFill/>
+                  </a:rPr>
+                  <a:t> </a:t>
+                </a:r>
+              </a:p>
+            </p:txBody>
+          </p:sp>
+        </mc:Fallback>
+      </mc:AlternateContent>
     </p:spTree>
   </p:cSld>
   <p:clrMapOvr>
@@ -7824,109 +8655,836 @@
             </a:br>
             <a:r>
               <a:rPr lang="zh-CN" altLang="en-US" dirty="0"/>
-              <a:t>概率</a:t>
-            </a:r>
-            <a:r>
-              <a:rPr lang="zh-CN" altLang="en-US" dirty="0"/>
-              <a:t>模型</a:t>
-            </a:r>
-            <a:endParaRPr lang="zh-CN" altLang="en-US" dirty="0"/>
-          </a:p>
-        </p:txBody>
-      </p:sp>
-      <p:graphicFrame>
-        <p:nvGraphicFramePr>
-          <p:cNvPr id="2" name="Object 5"/>
-          <p:cNvGraphicFramePr>
-            <a:graphicFrameLocks noChangeAspect="1"/>
-          </p:cNvGraphicFramePr>
-          <p:nvPr/>
-        </p:nvGraphicFramePr>
-        <p:xfrm>
-          <a:off x="1388110" y="1327150"/>
-          <a:ext cx="6140450" cy="1843405"/>
-        </p:xfrm>
-        <a:graphic>
-          <a:graphicData uri="http://schemas.openxmlformats.org/presentationml/2006/ole">
-            <mc:AlternateContent xmlns:mc="http://schemas.openxmlformats.org/markup-compatibility/2006">
-              <mc:Choice xmlns:v="urn:schemas-microsoft-com:vml" Requires="v">
-                <p:oleObj spid="_x0000_s3" name="Equation" r:id="rId1" imgW="3048000" imgH="914400" progId="Equation.3">
-                  <p:embed/>
-                </p:oleObj>
-              </mc:Choice>
-              <mc:Fallback>
-                <p:oleObj name="Equation" r:id="rId1" imgW="3048000" imgH="914400" progId="Equation.3">
-                  <p:embed/>
-                  <p:pic>
-                    <p:nvPicPr>
-                      <p:cNvPr id="0" name="Object 5"/>
-                      <p:cNvPicPr>
-                        <a:picLocks noChangeAspect="1" noChangeArrowheads="1"/>
-                      </p:cNvPicPr>
-                      <p:nvPr/>
-                    </p:nvPicPr>
-                    <p:blipFill>
-                      <a:blip r:embed="rId2">
-                        <a:extLst>
-                          <a:ext uri="{28A0092B-C50C-407E-A947-70E740481C1C}">
-                            <a14:useLocalDpi xmlns:a14="http://schemas.microsoft.com/office/drawing/2010/main" val="0"/>
-                          </a:ext>
-                        </a:extLst>
-                      </a:blip>
-                      <a:srcRect/>
-                      <a:stretch>
-                        <a:fillRect/>
-                      </a:stretch>
-                    </p:blipFill>
-                    <p:spPr bwMode="auto">
-                      <a:xfrm>
-                        <a:off x="1388110" y="1327150"/>
-                        <a:ext cx="6140450" cy="1843405"/>
-                      </a:xfrm>
-                      <a:prstGeom prst="rect">
-                        <a:avLst/>
-                      </a:prstGeom>
-                      <a:noFill/>
-                      <a:ln>
-                        <a:noFill/>
-                      </a:ln>
-                      <a:effectLst/>
-                      <a:extLst>
-                        <a:ext uri="{909E8E84-426E-40DD-AFC4-6F175D3DCCD1}">
-                          <a14:hiddenFill xmlns:a14="http://schemas.microsoft.com/office/drawing/2010/main">
-                            <a:solidFill>
-                              <a:schemeClr val="accent1"/>
-                            </a:solidFill>
-                          </a14:hiddenFill>
-                        </a:ext>
-                        <a:ext uri="{91240B29-F687-4F45-9708-019B960494DF}">
-                          <a14:hiddenLine xmlns:a14="http://schemas.microsoft.com/office/drawing/2010/main" w="9525">
-                            <a:solidFill>
-                              <a:schemeClr val="tx1"/>
-                            </a:solidFill>
-                            <a:miter lim="800000"/>
-                            <a:headEnd/>
-                            <a:tailEnd/>
-                          </a14:hiddenLine>
-                        </a:ext>
-                        <a:ext uri="{AF507438-7753-43E0-B8FC-AC1667EBCBE1}">
-                          <a14:hiddenEffects xmlns:a14="http://schemas.microsoft.com/office/drawing/2010/main">
-                            <a:effectLst>
-                              <a:outerShdw dist="35921" dir="2700000" algn="ctr" rotWithShape="0">
-                                <a:schemeClr val="bg2"/>
-                              </a:outerShdw>
-                            </a:effectLst>
-                          </a14:hiddenEffects>
-                        </a:ext>
-                      </a:extLst>
-                    </p:spPr>
-                  </p:pic>
-                </p:oleObj>
-              </mc:Fallback>
-            </mc:AlternateContent>
-          </a:graphicData>
-        </a:graphic>
-      </p:graphicFrame>
+              <a:t>概率模型</a:t>
+            </a:r>
+          </a:p>
+        </p:txBody>
+      </p:sp>
+      <mc:AlternateContent xmlns:mc="http://schemas.openxmlformats.org/markup-compatibility/2006">
+        <mc:Choice xmlns:a14="http://schemas.microsoft.com/office/drawing/2010/main" Requires="a14">
+          <p:sp>
+            <p:nvSpPr>
+              <p:cNvPr id="2" name="Object 5"/>
+              <p:cNvSpPr txBox="1"/>
+              <p:nvPr/>
+            </p:nvSpPr>
+            <p:spPr bwMode="auto">
+              <a:xfrm>
+                <a:off x="289956" y="1585912"/>
+                <a:ext cx="8664574" cy="1843088"/>
+              </a:xfrm>
+              <a:prstGeom prst="rect">
+                <a:avLst/>
+              </a:prstGeom>
+              <a:noFill/>
+              <a:ln>
+                <a:noFill/>
+              </a:ln>
+              <a:effectLst/>
+            </p:spPr>
+            <p:txBody>
+              <a:bodyPr>
+                <a:normAutofit/>
+              </a:bodyPr>
+              <a:lstStyle/>
+              <a:p>
+                <a:pPr/>
+                <a14:m>
+                  <m:oMathPara xmlns:m="http://schemas.openxmlformats.org/officeDocument/2006/math">
+                    <m:oMathParaPr>
+                      <m:jc m:val="left"/>
+                    </m:oMathParaPr>
+                    <m:oMath xmlns:m="http://schemas.openxmlformats.org/officeDocument/2006/math">
+                      <m:func>
+                        <m:funcPr>
+                          <m:ctrlPr>
+                            <a:rPr lang="en-US" sz="2400" i="1" smtClean="0">
+                              <a:solidFill>
+                                <a:srgbClr val="000000"/>
+                              </a:solidFill>
+                              <a:latin typeface="Cambria Math" panose="02040503050406030204" pitchFamily="18" charset="0"/>
+                            </a:rPr>
+                          </m:ctrlPr>
+                        </m:funcPr>
+                        <m:fName>
+                          <m:r>
+                            <m:rPr>
+                              <m:sty m:val="p"/>
+                            </m:rPr>
+                            <a:rPr lang="en-US" sz="2400" i="0">
+                              <a:solidFill>
+                                <a:srgbClr val="000000"/>
+                              </a:solidFill>
+                              <a:latin typeface="Cambria Math" panose="02040503050406030204" pitchFamily="18" charset="0"/>
+                            </a:rPr>
+                            <m:t>Pr</m:t>
+                          </m:r>
+                        </m:fName>
+                        <m:e>
+                          <m:r>
+                            <a:rPr lang="en-US" sz="2400" i="1">
+                              <a:solidFill>
+                                <a:srgbClr val="000000"/>
+                              </a:solidFill>
+                              <a:latin typeface="Cambria Math" panose="02040503050406030204" pitchFamily="18" charset="0"/>
+                            </a:rPr>
+                            <m:t>(</m:t>
+                          </m:r>
+                        </m:e>
+                      </m:func>
+                      <m:r>
+                        <a:rPr lang="en-US" sz="2400" i="1">
+                          <a:solidFill>
+                            <a:srgbClr val="000000"/>
+                          </a:solidFill>
+                          <a:latin typeface="Cambria Math" panose="02040503050406030204" pitchFamily="18" charset="0"/>
+                        </a:rPr>
+                        <m:t>00 00)</m:t>
+                      </m:r>
+                      <m:r>
+                        <m:rPr>
+                          <m:aln/>
+                        </m:rPr>
+                        <a:rPr lang="en-US" sz="2400" i="1">
+                          <a:solidFill>
+                            <a:srgbClr val="000000"/>
+                          </a:solidFill>
+                          <a:latin typeface="Cambria Math" panose="02040503050406030204" pitchFamily="18" charset="0"/>
+                        </a:rPr>
+                        <m:t>=</m:t>
+                      </m:r>
+                      <m:r>
+                        <a:rPr lang="en-US" sz="2400" i="1" smtClean="0">
+                          <a:solidFill>
+                            <a:srgbClr val="CC00FF"/>
+                          </a:solidFill>
+                          <a:latin typeface="Cambria Math" panose="02040503050406030204" pitchFamily="18" charset="0"/>
+                        </a:rPr>
+                        <m:t>𝜓</m:t>
+                      </m:r>
+                      <m:r>
+                        <a:rPr lang="en-US" sz="2400" i="1" smtClean="0">
+                          <a:solidFill>
+                            <a:srgbClr val="CC00FF"/>
+                          </a:solidFill>
+                          <a:latin typeface="Cambria Math" panose="02040503050406030204" pitchFamily="18" charset="0"/>
+                        </a:rPr>
+                        <m:t>(1−</m:t>
+                      </m:r>
+                      <m:sSub>
+                        <m:sSubPr>
+                          <m:ctrlPr>
+                            <a:rPr lang="en-US" sz="2400" i="1">
+                              <a:solidFill>
+                                <a:srgbClr val="CC00FF"/>
+                              </a:solidFill>
+                              <a:latin typeface="Cambria Math" panose="02040503050406030204" pitchFamily="18" charset="0"/>
+                            </a:rPr>
+                          </m:ctrlPr>
+                        </m:sSubPr>
+                        <m:e>
+                          <m:r>
+                            <a:rPr lang="en-US" sz="2400" i="1">
+                              <a:solidFill>
+                                <a:srgbClr val="CC00FF"/>
+                              </a:solidFill>
+                              <a:latin typeface="Cambria Math" panose="02040503050406030204" pitchFamily="18" charset="0"/>
+                            </a:rPr>
+                            <m:t>𝑝</m:t>
+                          </m:r>
+                        </m:e>
+                        <m:sub>
+                          <m:r>
+                            <a:rPr lang="en-US" sz="2400" i="1">
+                              <a:solidFill>
+                                <a:srgbClr val="CC00FF"/>
+                              </a:solidFill>
+                              <a:latin typeface="Cambria Math" panose="02040503050406030204" pitchFamily="18" charset="0"/>
+                            </a:rPr>
+                            <m:t>1</m:t>
+                          </m:r>
+                        </m:sub>
+                      </m:sSub>
+                      <m:r>
+                        <a:rPr lang="en-US" sz="2400" i="1">
+                          <a:solidFill>
+                            <a:srgbClr val="CC00FF"/>
+                          </a:solidFill>
+                          <a:latin typeface="Cambria Math" panose="02040503050406030204" pitchFamily="18" charset="0"/>
+                        </a:rPr>
+                        <m:t>)(1−</m:t>
+                      </m:r>
+                      <m:sSub>
+                        <m:sSubPr>
+                          <m:ctrlPr>
+                            <a:rPr lang="en-US" sz="2400" i="1">
+                              <a:solidFill>
+                                <a:srgbClr val="CC00FF"/>
+                              </a:solidFill>
+                              <a:latin typeface="Cambria Math" panose="02040503050406030204" pitchFamily="18" charset="0"/>
+                            </a:rPr>
+                          </m:ctrlPr>
+                        </m:sSubPr>
+                        <m:e>
+                          <m:r>
+                            <a:rPr lang="en-US" sz="2400" i="1">
+                              <a:solidFill>
+                                <a:srgbClr val="CC00FF"/>
+                              </a:solidFill>
+                              <a:latin typeface="Cambria Math" panose="02040503050406030204" pitchFamily="18" charset="0"/>
+                            </a:rPr>
+                            <m:t>𝑝</m:t>
+                          </m:r>
+                        </m:e>
+                        <m:sub>
+                          <m:r>
+                            <a:rPr lang="en-US" sz="2400" i="1">
+                              <a:solidFill>
+                                <a:srgbClr val="CC00FF"/>
+                              </a:solidFill>
+                              <a:latin typeface="Cambria Math" panose="02040503050406030204" pitchFamily="18" charset="0"/>
+                            </a:rPr>
+                            <m:t>2</m:t>
+                          </m:r>
+                        </m:sub>
+                      </m:sSub>
+                      <m:r>
+                        <a:rPr lang="en-US" sz="2400" i="1">
+                          <a:solidFill>
+                            <a:srgbClr val="CC00FF"/>
+                          </a:solidFill>
+                          <a:latin typeface="Cambria Math" panose="02040503050406030204" pitchFamily="18" charset="0"/>
+                        </a:rPr>
+                        <m:t>)(1−</m:t>
+                      </m:r>
+                      <m:sSub>
+                        <m:sSubPr>
+                          <m:ctrlPr>
+                            <a:rPr lang="en-US" sz="2400" i="1">
+                              <a:solidFill>
+                                <a:srgbClr val="CC00FF"/>
+                              </a:solidFill>
+                              <a:latin typeface="Cambria Math" panose="02040503050406030204" pitchFamily="18" charset="0"/>
+                            </a:rPr>
+                          </m:ctrlPr>
+                        </m:sSubPr>
+                        <m:e>
+                          <m:r>
+                            <a:rPr lang="en-US" sz="2400" i="1">
+                              <a:solidFill>
+                                <a:srgbClr val="CC00FF"/>
+                              </a:solidFill>
+                              <a:latin typeface="Cambria Math" panose="02040503050406030204" pitchFamily="18" charset="0"/>
+                            </a:rPr>
+                            <m:t>𝜀</m:t>
+                          </m:r>
+                        </m:e>
+                        <m:sub>
+                          <m:r>
+                            <a:rPr lang="en-US" sz="2400" i="1">
+                              <a:solidFill>
+                                <a:srgbClr val="CC00FF"/>
+                              </a:solidFill>
+                              <a:latin typeface="Cambria Math" panose="02040503050406030204" pitchFamily="18" charset="0"/>
+                            </a:rPr>
+                            <m:t>1</m:t>
+                          </m:r>
+                        </m:sub>
+                      </m:sSub>
+                      <m:r>
+                        <a:rPr lang="en-US" sz="2400" i="1">
+                          <a:solidFill>
+                            <a:srgbClr val="CC00FF"/>
+                          </a:solidFill>
+                          <a:latin typeface="Cambria Math" panose="02040503050406030204" pitchFamily="18" charset="0"/>
+                        </a:rPr>
+                        <m:t>)(1−</m:t>
+                      </m:r>
+                      <m:sSub>
+                        <m:sSubPr>
+                          <m:ctrlPr>
+                            <a:rPr lang="en-US" sz="2400" i="1">
+                              <a:solidFill>
+                                <a:srgbClr val="CC00FF"/>
+                              </a:solidFill>
+                              <a:latin typeface="Cambria Math" panose="02040503050406030204" pitchFamily="18" charset="0"/>
+                            </a:rPr>
+                          </m:ctrlPr>
+                        </m:sSubPr>
+                        <m:e>
+                          <m:r>
+                            <a:rPr lang="en-US" sz="2400" i="1">
+                              <a:solidFill>
+                                <a:srgbClr val="CC00FF"/>
+                              </a:solidFill>
+                              <a:latin typeface="Cambria Math" panose="02040503050406030204" pitchFamily="18" charset="0"/>
+                            </a:rPr>
+                            <m:t>𝑝</m:t>
+                          </m:r>
+                        </m:e>
+                        <m:sub>
+                          <m:r>
+                            <a:rPr lang="en-US" sz="2400" i="1">
+                              <a:solidFill>
+                                <a:srgbClr val="CC00FF"/>
+                              </a:solidFill>
+                              <a:latin typeface="Cambria Math" panose="02040503050406030204" pitchFamily="18" charset="0"/>
+                            </a:rPr>
+                            <m:t>3</m:t>
+                          </m:r>
+                        </m:sub>
+                      </m:sSub>
+                      <m:r>
+                        <a:rPr lang="en-US" sz="2400" i="1">
+                          <a:solidFill>
+                            <a:srgbClr val="CC00FF"/>
+                          </a:solidFill>
+                          <a:latin typeface="Cambria Math" panose="02040503050406030204" pitchFamily="18" charset="0"/>
+                        </a:rPr>
+                        <m:t>)(1−</m:t>
+                      </m:r>
+                      <m:sSub>
+                        <m:sSubPr>
+                          <m:ctrlPr>
+                            <a:rPr lang="en-US" sz="2400" i="1">
+                              <a:solidFill>
+                                <a:srgbClr val="CC00FF"/>
+                              </a:solidFill>
+                              <a:latin typeface="Cambria Math" panose="02040503050406030204" pitchFamily="18" charset="0"/>
+                            </a:rPr>
+                          </m:ctrlPr>
+                        </m:sSubPr>
+                        <m:e>
+                          <m:r>
+                            <a:rPr lang="en-US" sz="2400" i="1">
+                              <a:solidFill>
+                                <a:srgbClr val="CC00FF"/>
+                              </a:solidFill>
+                              <a:latin typeface="Cambria Math" panose="02040503050406030204" pitchFamily="18" charset="0"/>
+                            </a:rPr>
+                            <m:t>𝑝</m:t>
+                          </m:r>
+                        </m:e>
+                        <m:sub>
+                          <m:r>
+                            <a:rPr lang="en-US" sz="2400" i="1">
+                              <a:solidFill>
+                                <a:srgbClr val="CC00FF"/>
+                              </a:solidFill>
+                              <a:latin typeface="Cambria Math" panose="02040503050406030204" pitchFamily="18" charset="0"/>
+                            </a:rPr>
+                            <m:t>4</m:t>
+                          </m:r>
+                        </m:sub>
+                      </m:sSub>
+                      <m:r>
+                        <a:rPr lang="en-US" sz="2400" i="1">
+                          <a:solidFill>
+                            <a:srgbClr val="CC00FF"/>
+                          </a:solidFill>
+                          <a:latin typeface="Cambria Math" panose="02040503050406030204" pitchFamily="18" charset="0"/>
+                        </a:rPr>
+                        <m:t>)</m:t>
+                      </m:r>
+                    </m:oMath>
+                    <m:oMath xmlns:m="http://schemas.openxmlformats.org/officeDocument/2006/math">
+                      <m:r>
+                        <m:rPr>
+                          <m:aln/>
+                        </m:rPr>
+                        <a:rPr lang="en-US" sz="2400" i="1" smtClean="0">
+                          <a:solidFill>
+                            <a:srgbClr val="00B050"/>
+                          </a:solidFill>
+                          <a:latin typeface="Cambria Math" panose="02040503050406030204" pitchFamily="18" charset="0"/>
+                        </a:rPr>
+                        <m:t>+</m:t>
+                      </m:r>
+                      <m:r>
+                        <a:rPr lang="en-US" sz="2400" i="1">
+                          <a:solidFill>
+                            <a:srgbClr val="00B050"/>
+                          </a:solidFill>
+                          <a:latin typeface="Cambria Math" panose="02040503050406030204" pitchFamily="18" charset="0"/>
+                        </a:rPr>
+                        <m:t>𝜓</m:t>
+                      </m:r>
+                      <m:r>
+                        <a:rPr lang="en-US" sz="2400" i="1">
+                          <a:solidFill>
+                            <a:srgbClr val="00B050"/>
+                          </a:solidFill>
+                          <a:latin typeface="Cambria Math" panose="02040503050406030204" pitchFamily="18" charset="0"/>
+                        </a:rPr>
+                        <m:t>(1−</m:t>
+                      </m:r>
+                      <m:sSub>
+                        <m:sSubPr>
+                          <m:ctrlPr>
+                            <a:rPr lang="en-US" sz="2400" i="1">
+                              <a:solidFill>
+                                <a:srgbClr val="00B050"/>
+                              </a:solidFill>
+                              <a:latin typeface="Cambria Math" panose="02040503050406030204" pitchFamily="18" charset="0"/>
+                            </a:rPr>
+                          </m:ctrlPr>
+                        </m:sSubPr>
+                        <m:e>
+                          <m:r>
+                            <a:rPr lang="en-US" sz="2400" i="1">
+                              <a:solidFill>
+                                <a:srgbClr val="00B050"/>
+                              </a:solidFill>
+                              <a:latin typeface="Cambria Math" panose="02040503050406030204" pitchFamily="18" charset="0"/>
+                            </a:rPr>
+                            <m:t>𝑝</m:t>
+                          </m:r>
+                        </m:e>
+                        <m:sub>
+                          <m:r>
+                            <a:rPr lang="en-US" sz="2400" i="1">
+                              <a:solidFill>
+                                <a:srgbClr val="00B050"/>
+                              </a:solidFill>
+                              <a:latin typeface="Cambria Math" panose="02040503050406030204" pitchFamily="18" charset="0"/>
+                            </a:rPr>
+                            <m:t>1</m:t>
+                          </m:r>
+                        </m:sub>
+                      </m:sSub>
+                      <m:r>
+                        <a:rPr lang="en-US" sz="2400" i="1">
+                          <a:solidFill>
+                            <a:srgbClr val="00B050"/>
+                          </a:solidFill>
+                          <a:latin typeface="Cambria Math" panose="02040503050406030204" pitchFamily="18" charset="0"/>
+                        </a:rPr>
+                        <m:t>)(1−</m:t>
+                      </m:r>
+                      <m:sSub>
+                        <m:sSubPr>
+                          <m:ctrlPr>
+                            <a:rPr lang="en-US" sz="2400" i="1">
+                              <a:solidFill>
+                                <a:srgbClr val="00B050"/>
+                              </a:solidFill>
+                              <a:latin typeface="Cambria Math" panose="02040503050406030204" pitchFamily="18" charset="0"/>
+                            </a:rPr>
+                          </m:ctrlPr>
+                        </m:sSubPr>
+                        <m:e>
+                          <m:r>
+                            <a:rPr lang="en-US" sz="2400" i="1">
+                              <a:solidFill>
+                                <a:srgbClr val="00B050"/>
+                              </a:solidFill>
+                              <a:latin typeface="Cambria Math" panose="02040503050406030204" pitchFamily="18" charset="0"/>
+                            </a:rPr>
+                            <m:t>𝑝</m:t>
+                          </m:r>
+                        </m:e>
+                        <m:sub>
+                          <m:r>
+                            <a:rPr lang="en-US" sz="2400" i="1">
+                              <a:solidFill>
+                                <a:srgbClr val="00B050"/>
+                              </a:solidFill>
+                              <a:latin typeface="Cambria Math" panose="02040503050406030204" pitchFamily="18" charset="0"/>
+                            </a:rPr>
+                            <m:t>2</m:t>
+                          </m:r>
+                        </m:sub>
+                      </m:sSub>
+                      <m:r>
+                        <a:rPr lang="en-US" sz="2400" i="1">
+                          <a:solidFill>
+                            <a:srgbClr val="00B050"/>
+                          </a:solidFill>
+                          <a:latin typeface="Cambria Math" panose="02040503050406030204" pitchFamily="18" charset="0"/>
+                        </a:rPr>
+                        <m:t>)(</m:t>
+                      </m:r>
+                      <m:sSub>
+                        <m:sSubPr>
+                          <m:ctrlPr>
+                            <a:rPr lang="en-US" sz="2400" i="1">
+                              <a:solidFill>
+                                <a:srgbClr val="00B050"/>
+                              </a:solidFill>
+                              <a:latin typeface="Cambria Math" panose="02040503050406030204" pitchFamily="18" charset="0"/>
+                            </a:rPr>
+                          </m:ctrlPr>
+                        </m:sSubPr>
+                        <m:e>
+                          <m:r>
+                            <a:rPr lang="en-US" sz="2400" i="1">
+                              <a:solidFill>
+                                <a:srgbClr val="00B050"/>
+                              </a:solidFill>
+                              <a:latin typeface="Cambria Math" panose="02040503050406030204" pitchFamily="18" charset="0"/>
+                            </a:rPr>
+                            <m:t>𝜀</m:t>
+                          </m:r>
+                        </m:e>
+                        <m:sub>
+                          <m:r>
+                            <a:rPr lang="en-US" sz="2400" i="1">
+                              <a:solidFill>
+                                <a:srgbClr val="00B050"/>
+                              </a:solidFill>
+                              <a:latin typeface="Cambria Math" panose="02040503050406030204" pitchFamily="18" charset="0"/>
+                            </a:rPr>
+                            <m:t>1</m:t>
+                          </m:r>
+                        </m:sub>
+                      </m:sSub>
+                      <m:r>
+                        <a:rPr lang="en-US" sz="2400" i="1">
+                          <a:solidFill>
+                            <a:srgbClr val="00B050"/>
+                          </a:solidFill>
+                          <a:latin typeface="Cambria Math" panose="02040503050406030204" pitchFamily="18" charset="0"/>
+                        </a:rPr>
+                        <m:t>)</m:t>
+                      </m:r>
+                    </m:oMath>
+                    <m:oMath xmlns:m="http://schemas.openxmlformats.org/officeDocument/2006/math">
+                      <m:r>
+                        <m:rPr>
+                          <m:aln/>
+                        </m:rPr>
+                        <a:rPr lang="en-US" sz="2400" i="1" smtClean="0">
+                          <a:solidFill>
+                            <a:srgbClr val="C00000"/>
+                          </a:solidFill>
+                          <a:latin typeface="Cambria Math" panose="02040503050406030204" pitchFamily="18" charset="0"/>
+                        </a:rPr>
+                        <m:t>+</m:t>
+                      </m:r>
+                      <m:r>
+                        <a:rPr lang="en-US" sz="2400" i="1">
+                          <a:solidFill>
+                            <a:srgbClr val="C00000"/>
+                          </a:solidFill>
+                          <a:latin typeface="Cambria Math" panose="02040503050406030204" pitchFamily="18" charset="0"/>
+                        </a:rPr>
+                        <m:t>(1−</m:t>
+                      </m:r>
+                      <m:r>
+                        <a:rPr lang="en-US" sz="2400" i="1">
+                          <a:solidFill>
+                            <a:srgbClr val="C00000"/>
+                          </a:solidFill>
+                          <a:latin typeface="Cambria Math" panose="02040503050406030204" pitchFamily="18" charset="0"/>
+                        </a:rPr>
+                        <m:t>𝜓</m:t>
+                      </m:r>
+                      <m:r>
+                        <a:rPr lang="en-US" sz="2400" i="1">
+                          <a:solidFill>
+                            <a:srgbClr val="C00000"/>
+                          </a:solidFill>
+                          <a:latin typeface="Cambria Math" panose="02040503050406030204" pitchFamily="18" charset="0"/>
+                        </a:rPr>
+                        <m:t>)(1−</m:t>
+                      </m:r>
+                      <m:sSub>
+                        <m:sSubPr>
+                          <m:ctrlPr>
+                            <a:rPr lang="en-US" sz="2400" i="1">
+                              <a:solidFill>
+                                <a:srgbClr val="C00000"/>
+                              </a:solidFill>
+                              <a:latin typeface="Cambria Math" panose="02040503050406030204" pitchFamily="18" charset="0"/>
+                            </a:rPr>
+                          </m:ctrlPr>
+                        </m:sSubPr>
+                        <m:e>
+                          <m:r>
+                            <a:rPr lang="en-US" sz="2400" i="1">
+                              <a:solidFill>
+                                <a:srgbClr val="C00000"/>
+                              </a:solidFill>
+                              <a:latin typeface="Cambria Math" panose="02040503050406030204" pitchFamily="18" charset="0"/>
+                            </a:rPr>
+                            <m:t>𝛾</m:t>
+                          </m:r>
+                        </m:e>
+                        <m:sub>
+                          <m:r>
+                            <a:rPr lang="en-US" sz="2400" i="1">
+                              <a:solidFill>
+                                <a:srgbClr val="C00000"/>
+                              </a:solidFill>
+                              <a:latin typeface="Cambria Math" panose="02040503050406030204" pitchFamily="18" charset="0"/>
+                            </a:rPr>
+                            <m:t>1</m:t>
+                          </m:r>
+                        </m:sub>
+                      </m:sSub>
+                      <m:r>
+                        <a:rPr lang="en-US" sz="2400" i="1">
+                          <a:solidFill>
+                            <a:srgbClr val="C00000"/>
+                          </a:solidFill>
+                          <a:latin typeface="Cambria Math" panose="02040503050406030204" pitchFamily="18" charset="0"/>
+                        </a:rPr>
+                        <m:t>)</m:t>
+                      </m:r>
+                    </m:oMath>
+                    <m:oMath xmlns:m="http://schemas.openxmlformats.org/officeDocument/2006/math">
+                      <m:r>
+                        <a:rPr lang="en-US" sz="2400" b="0" i="1" smtClean="0">
+                          <a:solidFill>
+                            <a:srgbClr val="000000"/>
+                          </a:solidFill>
+                          <a:latin typeface="Cambria Math" panose="02040503050406030204" pitchFamily="18" charset="0"/>
+                        </a:rPr>
+                        <m:t>                      </m:t>
+                      </m:r>
+                      <m:r>
+                        <a:rPr lang="en-US" sz="2400" i="1" smtClean="0">
+                          <a:solidFill>
+                            <a:schemeClr val="accent5">
+                              <a:lumMod val="75000"/>
+                            </a:schemeClr>
+                          </a:solidFill>
+                          <a:latin typeface="Cambria Math" panose="02040503050406030204" pitchFamily="18" charset="0"/>
+                        </a:rPr>
+                        <m:t>+(1−</m:t>
+                      </m:r>
+                      <m:r>
+                        <a:rPr lang="en-US" sz="2400" i="1" smtClean="0">
+                          <a:solidFill>
+                            <a:schemeClr val="accent5">
+                              <a:lumMod val="75000"/>
+                            </a:schemeClr>
+                          </a:solidFill>
+                          <a:latin typeface="Cambria Math" panose="02040503050406030204" pitchFamily="18" charset="0"/>
+                        </a:rPr>
+                        <m:t>𝜓</m:t>
+                      </m:r>
+                      <m:r>
+                        <a:rPr lang="en-US" sz="2400" i="1" smtClean="0">
+                          <a:solidFill>
+                            <a:schemeClr val="accent5">
+                              <a:lumMod val="75000"/>
+                            </a:schemeClr>
+                          </a:solidFill>
+                          <a:latin typeface="Cambria Math" panose="02040503050406030204" pitchFamily="18" charset="0"/>
+                        </a:rPr>
+                        <m:t>)(</m:t>
+                      </m:r>
+                      <m:sSub>
+                        <m:sSubPr>
+                          <m:ctrlPr>
+                            <a:rPr lang="en-US" sz="2400" i="1">
+                              <a:solidFill>
+                                <a:schemeClr val="accent5">
+                                  <a:lumMod val="75000"/>
+                                </a:schemeClr>
+                              </a:solidFill>
+                              <a:latin typeface="Cambria Math" panose="02040503050406030204" pitchFamily="18" charset="0"/>
+                            </a:rPr>
+                          </m:ctrlPr>
+                        </m:sSubPr>
+                        <m:e>
+                          <m:r>
+                            <a:rPr lang="en-US" sz="2400" i="1">
+                              <a:solidFill>
+                                <a:schemeClr val="accent5">
+                                  <a:lumMod val="75000"/>
+                                </a:schemeClr>
+                              </a:solidFill>
+                              <a:latin typeface="Cambria Math" panose="02040503050406030204" pitchFamily="18" charset="0"/>
+                            </a:rPr>
+                            <m:t>𝛾</m:t>
+                          </m:r>
+                        </m:e>
+                        <m:sub>
+                          <m:r>
+                            <a:rPr lang="en-US" sz="2400" i="1">
+                              <a:solidFill>
+                                <a:schemeClr val="accent5">
+                                  <a:lumMod val="75000"/>
+                                </a:schemeClr>
+                              </a:solidFill>
+                              <a:latin typeface="Cambria Math" panose="02040503050406030204" pitchFamily="18" charset="0"/>
+                            </a:rPr>
+                            <m:t>1</m:t>
+                          </m:r>
+                        </m:sub>
+                      </m:sSub>
+                      <m:r>
+                        <a:rPr lang="en-US" sz="2400" i="1">
+                          <a:solidFill>
+                            <a:schemeClr val="accent5">
+                              <a:lumMod val="75000"/>
+                            </a:schemeClr>
+                          </a:solidFill>
+                          <a:latin typeface="Cambria Math" panose="02040503050406030204" pitchFamily="18" charset="0"/>
+                        </a:rPr>
+                        <m:t>)(1−</m:t>
+                      </m:r>
+                      <m:sSub>
+                        <m:sSubPr>
+                          <m:ctrlPr>
+                            <a:rPr lang="en-US" sz="2400" i="1">
+                              <a:solidFill>
+                                <a:schemeClr val="accent5">
+                                  <a:lumMod val="75000"/>
+                                </a:schemeClr>
+                              </a:solidFill>
+                              <a:latin typeface="Cambria Math" panose="02040503050406030204" pitchFamily="18" charset="0"/>
+                            </a:rPr>
+                          </m:ctrlPr>
+                        </m:sSubPr>
+                        <m:e>
+                          <m:r>
+                            <a:rPr lang="en-US" sz="2400" i="1">
+                              <a:solidFill>
+                                <a:schemeClr val="accent5">
+                                  <a:lumMod val="75000"/>
+                                </a:schemeClr>
+                              </a:solidFill>
+                              <a:latin typeface="Cambria Math" panose="02040503050406030204" pitchFamily="18" charset="0"/>
+                            </a:rPr>
+                            <m:t>𝑝</m:t>
+                          </m:r>
+                        </m:e>
+                        <m:sub>
+                          <m:r>
+                            <a:rPr lang="en-US" sz="2400" i="1">
+                              <a:solidFill>
+                                <a:schemeClr val="accent5">
+                                  <a:lumMod val="75000"/>
+                                </a:schemeClr>
+                              </a:solidFill>
+                              <a:latin typeface="Cambria Math" panose="02040503050406030204" pitchFamily="18" charset="0"/>
+                            </a:rPr>
+                            <m:t>3</m:t>
+                          </m:r>
+                        </m:sub>
+                      </m:sSub>
+                      <m:r>
+                        <a:rPr lang="en-US" sz="2400" i="1">
+                          <a:solidFill>
+                            <a:schemeClr val="accent5">
+                              <a:lumMod val="75000"/>
+                            </a:schemeClr>
+                          </a:solidFill>
+                          <a:latin typeface="Cambria Math" panose="02040503050406030204" pitchFamily="18" charset="0"/>
+                        </a:rPr>
+                        <m:t>)(1−</m:t>
+                      </m:r>
+                      <m:sSub>
+                        <m:sSubPr>
+                          <m:ctrlPr>
+                            <a:rPr lang="en-US" sz="2400" i="1">
+                              <a:solidFill>
+                                <a:schemeClr val="accent5">
+                                  <a:lumMod val="75000"/>
+                                </a:schemeClr>
+                              </a:solidFill>
+                              <a:latin typeface="Cambria Math" panose="02040503050406030204" pitchFamily="18" charset="0"/>
+                            </a:rPr>
+                          </m:ctrlPr>
+                        </m:sSubPr>
+                        <m:e>
+                          <m:r>
+                            <a:rPr lang="en-US" sz="2400" i="1">
+                              <a:solidFill>
+                                <a:schemeClr val="accent5">
+                                  <a:lumMod val="75000"/>
+                                </a:schemeClr>
+                              </a:solidFill>
+                              <a:latin typeface="Cambria Math" panose="02040503050406030204" pitchFamily="18" charset="0"/>
+                            </a:rPr>
+                            <m:t>𝑝</m:t>
+                          </m:r>
+                        </m:e>
+                        <m:sub>
+                          <m:r>
+                            <a:rPr lang="en-US" sz="2400" i="1">
+                              <a:solidFill>
+                                <a:schemeClr val="accent5">
+                                  <a:lumMod val="75000"/>
+                                </a:schemeClr>
+                              </a:solidFill>
+                              <a:latin typeface="Cambria Math" panose="02040503050406030204" pitchFamily="18" charset="0"/>
+                            </a:rPr>
+                            <m:t>4</m:t>
+                          </m:r>
+                        </m:sub>
+                      </m:sSub>
+                      <m:r>
+                        <a:rPr lang="en-US" sz="2400" i="1">
+                          <a:solidFill>
+                            <a:schemeClr val="accent5">
+                              <a:lumMod val="75000"/>
+                            </a:schemeClr>
+                          </a:solidFill>
+                          <a:latin typeface="Cambria Math" panose="02040503050406030204" pitchFamily="18" charset="0"/>
+                        </a:rPr>
+                        <m:t>)</m:t>
+                      </m:r>
+                    </m:oMath>
+                  </m:oMathPara>
+                </a14:m>
+                <a:endParaRPr lang="en-US" dirty="0">
+                  <a:solidFill>
+                    <a:schemeClr val="accent5">
+                      <a:lumMod val="75000"/>
+                    </a:schemeClr>
+                  </a:solidFill>
+                </a:endParaRPr>
+              </a:p>
+            </p:txBody>
+          </p:sp>
+        </mc:Choice>
+        <mc:Fallback>
+          <p:sp>
+            <p:nvSpPr>
+              <p:cNvPr id="2" name="Object 5"/>
+              <p:cNvSpPr txBox="1">
+                <a:spLocks noRot="1" noChangeAspect="1" noMove="1" noResize="1" noEditPoints="1" noAdjustHandles="1" noChangeArrowheads="1" noChangeShapeType="1" noTextEdit="1"/>
+              </p:cNvSpPr>
+              <p:nvPr/>
+            </p:nvSpPr>
+            <p:spPr bwMode="auto">
+              <a:xfrm>
+                <a:off x="289956" y="1585912"/>
+                <a:ext cx="8664574" cy="1843088"/>
+              </a:xfrm>
+              <a:prstGeom prst="rect">
+                <a:avLst/>
+              </a:prstGeom>
+              <a:blipFill>
+                <a:blip r:embed="rId3"/>
+                <a:stretch>
+                  <a:fillRect l="-211"/>
+                </a:stretch>
+              </a:blipFill>
+              <a:ln>
+                <a:noFill/>
+              </a:ln>
+              <a:effectLst/>
+            </p:spPr>
+            <p:txBody>
+              <a:bodyPr/>
+              <a:lstStyle/>
+              <a:p>
+                <a:r>
+                  <a:rPr lang="en-US">
+                    <a:noFill/>
+                  </a:rPr>
+                  <a:t> </a:t>
+                </a:r>
+              </a:p>
+            </p:txBody>
+          </p:sp>
+        </mc:Fallback>
+      </mc:AlternateContent>
       <p:sp>
         <p:nvSpPr>
           <p:cNvPr id="8" name="TextBox 7"/>
@@ -7962,10 +9520,13 @@
               <a:buChar char="§"/>
             </a:pPr>
             <a:r>
-              <a:rPr lang="en-US" dirty="0"/>
+              <a:rPr lang="en-US" dirty="0">
+                <a:solidFill>
+                  <a:srgbClr val="CC00FF"/>
+                </a:solidFill>
+              </a:rPr>
               <a:t>Occupied and not detected on first and second, not extinct and not detected on second and fourth</a:t>
             </a:r>
-            <a:endParaRPr lang="en-US" dirty="0"/>
           </a:p>
           <a:p>
             <a:pPr algn="ctr"/>
@@ -7973,7 +9534,6 @@
               <a:rPr lang="en-US" dirty="0"/>
               <a:t>OR</a:t>
             </a:r>
-            <a:endParaRPr lang="en-US" dirty="0"/>
           </a:p>
           <a:p>
             <a:pPr marL="339725" indent="-339725">
@@ -7987,10 +9547,13 @@
               <a:buChar char="§"/>
             </a:pPr>
             <a:r>
-              <a:rPr lang="en-US" dirty="0"/>
+              <a:rPr lang="en-US" dirty="0">
+                <a:solidFill>
+                  <a:srgbClr val="00B050"/>
+                </a:solidFill>
+              </a:rPr>
               <a:t>Occupied and not detected on first and second and then unoccupied</a:t>
             </a:r>
-            <a:endParaRPr lang="en-US" dirty="0"/>
           </a:p>
           <a:p>
             <a:pPr marL="339725" indent="-339725" algn="ctr">
@@ -8005,7 +9568,6 @@
               <a:rPr lang="en-US" dirty="0"/>
               <a:t>OR</a:t>
             </a:r>
-            <a:endParaRPr lang="en-US" dirty="0"/>
           </a:p>
           <a:p>
             <a:pPr marL="339725" indent="-339725">
@@ -8019,10 +9581,13 @@
               <a:buChar char="§"/>
             </a:pPr>
             <a:r>
-              <a:rPr lang="en-US" dirty="0"/>
+              <a:rPr lang="en-US" dirty="0">
+                <a:solidFill>
+                  <a:srgbClr val="C00000"/>
+                </a:solidFill>
+              </a:rPr>
               <a:t>Not occupied and not colonized</a:t>
             </a:r>
-            <a:endParaRPr lang="en-US" dirty="0"/>
           </a:p>
           <a:p>
             <a:pPr marL="339725" indent="-339725" algn="ctr">
@@ -8037,7 +9602,6 @@
               <a:rPr lang="en-US" dirty="0"/>
               <a:t>OR</a:t>
             </a:r>
-            <a:endParaRPr lang="en-US" dirty="0"/>
           </a:p>
           <a:p>
             <a:pPr marL="339725" indent="-339725">
@@ -8051,10 +9615,15 @@
               <a:buChar char="§"/>
             </a:pPr>
             <a:r>
-              <a:rPr lang="en-US" dirty="0"/>
+              <a:rPr lang="en-US" dirty="0">
+                <a:solidFill>
+                  <a:schemeClr val="accent5">
+                    <a:lumMod val="75000"/>
+                  </a:schemeClr>
+                </a:solidFill>
+              </a:rPr>
               <a:t>Not occupied and colonized and undetected on third and fourth.</a:t>
             </a:r>
-            <a:endParaRPr lang="en-US" dirty="0"/>
           </a:p>
           <a:p>
             <a:pPr marL="339725" indent="-339725">
@@ -8068,10 +9637,13 @@
               <a:buChar char="§"/>
             </a:pPr>
             <a:r>
-              <a:rPr lang="en-US" dirty="0"/>
+              <a:rPr lang="en-US" dirty="0">
+                <a:solidFill>
+                  <a:srgbClr val="CC00FF"/>
+                </a:solidFill>
+              </a:rPr>
               <a:t>被占用但在第一和第二次采样中未被检测到，且在第二和第四次采样中未灭绝。</a:t>
             </a:r>
-            <a:endParaRPr lang="en-US" dirty="0"/>
           </a:p>
           <a:p>
             <a:pPr marL="339725" indent="-339725">
@@ -8085,10 +9657,13 @@
               <a:buChar char="§"/>
             </a:pPr>
             <a:r>
-              <a:rPr lang="en-US" dirty="0"/>
+              <a:rPr lang="en-US" dirty="0">
+                <a:solidFill>
+                  <a:srgbClr val="00B050"/>
+                </a:solidFill>
+              </a:rPr>
               <a:t>被占用但在第一和第二次采样中未被检测到，然后在第三和第四次采样中变为空缺。</a:t>
             </a:r>
-            <a:endParaRPr lang="en-US" dirty="0"/>
           </a:p>
           <a:p>
             <a:pPr marL="339725" indent="-339725">
@@ -8102,10 +9677,13 @@
               <a:buChar char="§"/>
             </a:pPr>
             <a:r>
-              <a:rPr lang="en-US" dirty="0"/>
+              <a:rPr lang="en-US" dirty="0">
+                <a:solidFill>
+                  <a:srgbClr val="C00000"/>
+                </a:solidFill>
+              </a:rPr>
               <a:t>未被占用且未被重新定居。</a:t>
             </a:r>
-            <a:endParaRPr lang="en-US" dirty="0"/>
           </a:p>
           <a:p>
             <a:pPr marL="339725" indent="-339725">
@@ -8119,18 +9697,39 @@
               <a:buChar char="§"/>
             </a:pPr>
             <a:r>
+              <a:rPr lang="en-US" dirty="0">
+                <a:solidFill>
+                  <a:schemeClr val="accent5">
+                    <a:lumMod val="75000"/>
+                  </a:schemeClr>
+                </a:solidFill>
+              </a:rPr>
+              <a:t>未被占用但被重新定居</a:t>
+            </a:r>
+            <a:r>
+              <a:rPr lang="zh-CN" altLang="en-US" dirty="0">
+                <a:solidFill>
+                  <a:schemeClr val="accent5">
+                    <a:lumMod val="75000"/>
+                  </a:schemeClr>
+                </a:solidFill>
+              </a:rPr>
+              <a:t>，</a:t>
+            </a:r>
+            <a:r>
+              <a:rPr lang="en-US" dirty="0">
+                <a:solidFill>
+                  <a:schemeClr val="accent5">
+                    <a:lumMod val="75000"/>
+                  </a:schemeClr>
+                </a:solidFill>
+              </a:rPr>
+              <a:t>且在第三和第四次采样中未被检测到</a:t>
+            </a:r>
+            <a:r>
               <a:rPr lang="en-US" dirty="0"/>
-              <a:t>未被占用但被重新定居</a:t>
-            </a:r>
-            <a:r>
-              <a:rPr lang="zh-CN" altLang="en-US" dirty="0"/>
-              <a:t>，</a:t>
-            </a:r>
-            <a:r>
-              <a:rPr lang="en-US" dirty="0"/>
-              <a:t>且在第三和第四次采样中未被检测到。</a:t>
-            </a:r>
-            <a:endParaRPr lang="en-US" dirty="0"/>
+              <a:t>。</a:t>
+            </a:r>
           </a:p>
         </p:txBody>
       </p:sp>
@@ -8188,7 +9787,6 @@
               <a:rPr lang="zh-CN" altLang="en-US"/>
               <a:t>结论</a:t>
             </a:r>
-            <a:endParaRPr lang="zh-CN" altLang="en-US"/>
           </a:p>
         </p:txBody>
       </p:sp>
@@ -8205,7 +9803,7 @@
         <p:spPr/>
         <p:txBody>
           <a:bodyPr>
-            <a:normAutofit fontScale="60000"/>
+            <a:normAutofit fontScale="67500" lnSpcReduction="10000"/>
           </a:bodyPr>
           <a:lstStyle/>
           <a:p>
@@ -8214,7 +9812,6 @@
               <a:rPr lang="en-US"/>
               <a:t>“Presence-absence” surveys can be used for inference when repeat visits permit estimation of detection probability</a:t>
             </a:r>
-            <a:endParaRPr lang="en-US"/>
           </a:p>
           <a:p>
             <a:pPr eaLnBrk="1" hangingPunct="1"/>
@@ -8222,7 +9819,6 @@
               <a:rPr lang="en-US"/>
               <a:t>Models permit estimation of occupancy during a single season or year</a:t>
             </a:r>
-            <a:endParaRPr lang="en-US"/>
           </a:p>
           <a:p>
             <a:pPr eaLnBrk="1" hangingPunct="1"/>
@@ -8230,7 +9826,6 @@
               <a:rPr lang="en-US"/>
               <a:t>Models permit estimation of patch-dynamic rate parameters (extinction, colonization, rate of change) over multiple seasons or years</a:t>
             </a:r>
-            <a:endParaRPr lang="en-US"/>
           </a:p>
           <a:p>
             <a:pPr eaLnBrk="1" hangingPunct="1"/>
@@ -8266,7 +9861,6 @@
               <a:rPr lang="en-US"/>
               <a:t>。</a:t>
             </a:r>
-            <a:endParaRPr lang="en-US"/>
           </a:p>
           <a:p>
             <a:pPr eaLnBrk="1" hangingPunct="1"/>
@@ -8286,7 +9880,6 @@
               <a:rPr lang="en-US"/>
               <a:t>。</a:t>
             </a:r>
-            <a:endParaRPr lang="en-US"/>
           </a:p>
           <a:p>
             <a:pPr eaLnBrk="1" hangingPunct="1"/>
@@ -8312,7 +9905,6 @@
               <a:rPr lang="zh-CN" altLang="en-US"/>
               <a:t>。</a:t>
             </a:r>
-            <a:endParaRPr lang="zh-CN" altLang="en-US"/>
           </a:p>
         </p:txBody>
       </p:sp>
@@ -8378,7 +9970,6 @@
               <a:rPr lang="zh-CN" altLang="en-US" dirty="0"/>
               <a:t>模型假设</a:t>
             </a:r>
-            <a:endParaRPr lang="zh-CN" altLang="en-US" dirty="0"/>
           </a:p>
         </p:txBody>
       </p:sp>
@@ -8400,7 +9991,7 @@
         </p:spPr>
         <p:txBody>
           <a:bodyPr>
-            <a:normAutofit fontScale="60000"/>
+            <a:normAutofit fontScale="67500" lnSpcReduction="10000"/>
           </a:bodyPr>
           <a:lstStyle/>
           <a:p>
@@ -8415,11 +10006,6 @@
               </a:rPr>
               <a:t>Sites are closed to changes in occupancy state between sampling occasions</a:t>
             </a:r>
-            <a:endParaRPr lang="en-US" b="1" dirty="0">
-              <a:solidFill>
-                <a:srgbClr val="C00000"/>
-              </a:solidFill>
-            </a:endParaRPr>
           </a:p>
           <a:p>
             <a:pPr marL="342900" lvl="1" indent="-342900" eaLnBrk="1" hangingPunct="1">
@@ -8429,7 +10015,6 @@
               <a:rPr lang="en-US" dirty="0"/>
               <a:t>Species are not falsely detected. </a:t>
             </a:r>
-            <a:endParaRPr lang="en-US" dirty="0"/>
           </a:p>
           <a:p>
             <a:pPr marL="342900" lvl="1" indent="-342900" eaLnBrk="1" hangingPunct="1">
@@ -8439,7 +10024,6 @@
               <a:rPr lang="en-US" dirty="0"/>
               <a:t>The detection process is independent at each site</a:t>
             </a:r>
-            <a:endParaRPr lang="en-US" dirty="0"/>
           </a:p>
           <a:p>
             <a:pPr marL="742950" lvl="2" indent="-342900" eaLnBrk="1" hangingPunct="1">
@@ -8449,7 +10033,6 @@
               <a:rPr lang="en-US" dirty="0"/>
               <a:t>Far enough apart to be biologically independent.</a:t>
             </a:r>
-            <a:endParaRPr lang="en-US" dirty="0"/>
           </a:p>
           <a:p>
             <a:pPr marL="342900" lvl="1" indent="-342900" eaLnBrk="1" hangingPunct="1">
@@ -8459,7 +10042,6 @@
               <a:rPr lang="en-US" dirty="0"/>
               <a:t>No heterogeneity in occupancy </a:t>
             </a:r>
-            <a:endParaRPr lang="en-US" dirty="0"/>
           </a:p>
           <a:p>
             <a:pPr marL="742950" lvl="2" indent="-342900" eaLnBrk="1" hangingPunct="1">
@@ -8469,7 +10051,6 @@
               <a:rPr lang="en-US" dirty="0"/>
               <a:t>than cannot be explained by covariates</a:t>
             </a:r>
-            <a:endParaRPr lang="en-US" dirty="0"/>
           </a:p>
           <a:p>
             <a:pPr marL="342900" lvl="1" indent="-342900" eaLnBrk="1" hangingPunct="1">
@@ -8479,7 +10060,6 @@
               <a:rPr lang="en-US" dirty="0"/>
               <a:t>No heterogeneity in detection </a:t>
             </a:r>
-            <a:endParaRPr lang="en-US" dirty="0"/>
           </a:p>
           <a:p>
             <a:pPr marL="742950" lvl="2" indent="-342900" eaLnBrk="1" hangingPunct="1">
@@ -8489,7 +10069,6 @@
               <a:rPr lang="en-US" dirty="0"/>
               <a:t>that cannot be explained by covariates</a:t>
             </a:r>
-            <a:endParaRPr lang="en-US" dirty="0"/>
           </a:p>
           <a:p>
             <a:pPr marL="742950" lvl="2" indent="-342900" eaLnBrk="1" hangingPunct="1">
@@ -8664,9 +10243,6 @@
               </a:rPr>
               <a:t>没有无法通过协变量解释的差异</a:t>
             </a:r>
-            <a:endParaRPr lang="en-US" sz="2400" dirty="0">
-              <a:sym typeface="+mn-ea"/>
-            </a:endParaRPr>
           </a:p>
           <a:p>
             <a:pPr marL="342900" lvl="1" indent="-342900" eaLnBrk="1" hangingPunct="1">
@@ -8690,9 +10266,6 @@
               </a:rPr>
               <a:t>没有无法通过协变量解释的差异</a:t>
             </a:r>
-            <a:endParaRPr lang="en-US" sz="2400" dirty="0">
-              <a:sym typeface="+mn-ea"/>
-            </a:endParaRPr>
           </a:p>
         </p:txBody>
       </p:sp>
@@ -8763,7 +10336,6 @@
               <a:rPr lang="en-US" dirty="0"/>
               <a:t>相同 </a:t>
             </a:r>
-            <a:endParaRPr lang="en-US" dirty="0"/>
           </a:p>
         </p:txBody>
       </p:sp>
@@ -8785,7 +10357,7 @@
         </p:spPr>
         <p:txBody>
           <a:bodyPr>
-            <a:normAutofit fontScale="80000"/>
+            <a:normAutofit fontScale="87500" lnSpcReduction="10000"/>
           </a:bodyPr>
           <a:lstStyle/>
           <a:p>
@@ -8798,7 +10370,6 @@
               <a:rPr lang="en-US"/>
               <a:t>Visit sites and spend time looking for individuals of interest or evidence that they are present</a:t>
             </a:r>
-            <a:endParaRPr lang="en-US"/>
           </a:p>
           <a:p>
             <a:pPr eaLnBrk="1" hangingPunct="1">
@@ -8838,7 +10409,6 @@
               <a:rPr lang="en-US"/>
               <a:t>证据</a:t>
             </a:r>
-            <a:endParaRPr lang="en-US"/>
           </a:p>
           <a:p>
             <a:pPr eaLnBrk="1" hangingPunct="1">
@@ -8858,7 +10428,6 @@
               <a:rPr lang="en-US"/>
               <a:t>Repeated presence-absence surveys</a:t>
             </a:r>
-            <a:endParaRPr lang="en-US"/>
           </a:p>
           <a:p>
             <a:pPr lvl="1" eaLnBrk="1" hangingPunct="1"/>
@@ -8866,7 +10435,6 @@
               <a:rPr lang="en-US"/>
               <a:t>Temporal replication at same site</a:t>
             </a:r>
-            <a:endParaRPr lang="en-US"/>
           </a:p>
           <a:p>
             <a:pPr lvl="1" eaLnBrk="1" hangingPunct="1"/>
@@ -8974,7 +10542,6 @@
               <a:rPr lang="en-US" b="1" dirty="0"/>
               <a:t>重要考虑因素</a:t>
             </a:r>
-            <a:endParaRPr lang="en-US" b="1" dirty="0"/>
           </a:p>
         </p:txBody>
       </p:sp>
@@ -8996,7 +10563,7 @@
         </p:spPr>
         <p:txBody>
           <a:bodyPr>
-            <a:normAutofit fontScale="50000"/>
+            <a:normAutofit fontScale="57500" lnSpcReduction="10000"/>
           </a:bodyPr>
           <a:lstStyle/>
           <a:p>
@@ -9009,7 +10576,6 @@
               <a:rPr lang="en-US" sz="3200" b="1" dirty="0"/>
               <a:t>Study design </a:t>
             </a:r>
-            <a:endParaRPr lang="en-US" sz="3200" b="1" dirty="0"/>
           </a:p>
           <a:p>
             <a:pPr lvl="1" eaLnBrk="1" hangingPunct="1">
@@ -9021,7 +10587,6 @@
               <a:rPr lang="en-US" sz="3200" dirty="0"/>
               <a:t>Scope of inference</a:t>
             </a:r>
-            <a:endParaRPr lang="en-US" sz="3200" dirty="0"/>
           </a:p>
           <a:p>
             <a:pPr lvl="1" eaLnBrk="1" hangingPunct="1">
@@ -9033,7 +10598,6 @@
               <a:rPr lang="en-US" sz="3200" dirty="0"/>
               <a:t>Elements of stratification and randomization</a:t>
             </a:r>
-            <a:endParaRPr lang="en-US" sz="3200" dirty="0"/>
           </a:p>
           <a:p>
             <a:pPr eaLnBrk="1" hangingPunct="1">
@@ -9045,7 +10609,6 @@
               <a:rPr lang="en-US" sz="3200" b="1" dirty="0"/>
               <a:t>Strength of inference!</a:t>
             </a:r>
-            <a:endParaRPr lang="en-US" sz="3200" b="1" dirty="0"/>
           </a:p>
           <a:p>
             <a:pPr lvl="1" eaLnBrk="1" hangingPunct="1">
@@ -9057,7 +10620,6 @@
               <a:rPr lang="en-US" sz="3200" dirty="0"/>
               <a:t>Strongest – experimental manipulation</a:t>
             </a:r>
-            <a:endParaRPr lang="en-US" sz="3200" dirty="0"/>
           </a:p>
           <a:p>
             <a:pPr lvl="1" eaLnBrk="1" hangingPunct="1">
@@ -9069,7 +10631,6 @@
               <a:rPr lang="en-US" sz="3200" dirty="0"/>
               <a:t>Weaker – constrained designs (e.g., before &amp; after)</a:t>
             </a:r>
-            <a:endParaRPr lang="en-US" sz="3200" dirty="0"/>
           </a:p>
           <a:p>
             <a:pPr lvl="1" eaLnBrk="1" hangingPunct="1">
@@ -9081,7 +10642,6 @@
               <a:rPr lang="en-US" sz="3200" dirty="0"/>
               <a:t>Weaker still – a prior modeling</a:t>
             </a:r>
-            <a:endParaRPr lang="en-US" sz="3200" dirty="0"/>
           </a:p>
           <a:p>
             <a:pPr lvl="1" eaLnBrk="1" hangingPunct="1">
@@ -9093,7 +10653,6 @@
               <a:rPr lang="en-US" sz="3200" dirty="0"/>
               <a:t>Worst – a posteriori storytelling</a:t>
             </a:r>
-            <a:endParaRPr lang="en-US" sz="3200" dirty="0"/>
           </a:p>
           <a:p>
             <a:pPr lvl="1" eaLnBrk="1" hangingPunct="1">
@@ -9115,7 +10674,6 @@
               <a:rPr lang="en-US" sz="3200" b="1" dirty="0"/>
               <a:t>研究设计</a:t>
             </a:r>
-            <a:endParaRPr lang="en-US" sz="3200" b="1" dirty="0"/>
           </a:p>
           <a:p>
             <a:pPr lvl="1" eaLnBrk="1" hangingPunct="1">
@@ -9129,7 +10687,6 @@
               <a:rPr lang="en-US" sz="3200" dirty="0"/>
               <a:t>推断范围</a:t>
             </a:r>
-            <a:endParaRPr lang="en-US" sz="3200" dirty="0"/>
           </a:p>
           <a:p>
             <a:pPr lvl="1" eaLnBrk="1" hangingPunct="1">
@@ -9143,7 +10700,6 @@
               <a:rPr lang="en-US" sz="3200" dirty="0"/>
               <a:t>分层和随机化的要素</a:t>
             </a:r>
-            <a:endParaRPr lang="en-US" sz="3200" dirty="0"/>
           </a:p>
           <a:p>
             <a:pPr marL="0" lvl="1" fontAlgn="auto">
@@ -9161,7 +10717,6 @@
               <a:rPr lang="zh-CN" altLang="en-US" sz="3200" b="1" dirty="0"/>
               <a:t>！</a:t>
             </a:r>
-            <a:endParaRPr lang="zh-CN" altLang="en-US" sz="3200" b="1" dirty="0"/>
           </a:p>
           <a:p>
             <a:pPr lvl="1" algn="l" eaLnBrk="1" hangingPunct="1">
@@ -9177,7 +10732,6 @@
               <a:rPr lang="en-US" sz="3200" dirty="0"/>
               <a:t>最强—实验操作</a:t>
             </a:r>
-            <a:endParaRPr lang="en-US" sz="3200" dirty="0"/>
           </a:p>
           <a:p>
             <a:pPr lvl="1" algn="l" eaLnBrk="1" hangingPunct="1">
@@ -9193,7 +10747,6 @@
               <a:rPr lang="en-US" sz="3200" dirty="0"/>
               <a:t>较弱—受限制的设计（如前后对比）</a:t>
             </a:r>
-            <a:endParaRPr lang="en-US" sz="3200" dirty="0"/>
           </a:p>
           <a:p>
             <a:pPr lvl="1" algn="l" eaLnBrk="1" hangingPunct="1">
@@ -9209,7 +10762,6 @@
               <a:rPr lang="en-US" sz="3200" dirty="0"/>
               <a:t>更弱—先验建模</a:t>
             </a:r>
-            <a:endParaRPr lang="en-US" sz="3200" dirty="0"/>
           </a:p>
           <a:p>
             <a:pPr lvl="1" algn="l" eaLnBrk="1" hangingPunct="1">
@@ -9225,7 +10777,6 @@
               <a:rPr lang="en-US" sz="3200" dirty="0"/>
               <a:t>最差—事后故事叙述</a:t>
             </a:r>
-            <a:endParaRPr lang="en-US" sz="3200" dirty="0"/>
           </a:p>
         </p:txBody>
       </p:sp>
@@ -9295,13 +10846,7 @@
               <a:rPr lang="zh-CN" altLang="en-US" sz="3110" dirty="0">
                 <a:sym typeface="+mn-ea"/>
               </a:rPr>
-              <a:t>地块</a:t>
-            </a:r>
-            <a:r>
-              <a:rPr lang="zh-CN" altLang="en-US" sz="3110" dirty="0">
-                <a:sym typeface="+mn-ea"/>
-              </a:rPr>
-              <a:t>占用</a:t>
+              <a:t>地块占用</a:t>
             </a:r>
             <a:r>
               <a:rPr lang="en-US" sz="3110" dirty="0">
@@ -9342,7 +10887,7 @@
         </p:spPr>
         <p:txBody>
           <a:bodyPr>
-            <a:normAutofit fontScale="70000"/>
+            <a:normAutofit fontScale="77500" lnSpcReduction="10000"/>
           </a:bodyPr>
           <a:lstStyle/>
           <a:p>
@@ -9353,7 +10898,6 @@
               <a:rPr lang="en-US" dirty="0"/>
               <a:t>Hierarchical sampling scheme:</a:t>
             </a:r>
-            <a:endParaRPr lang="en-US" dirty="0"/>
           </a:p>
           <a:p>
             <a:pPr marL="0" indent="0" eaLnBrk="1" hangingPunct="1">
@@ -9371,7 +10915,6 @@
               <a:rPr lang="en-US" dirty="0"/>
               <a:t>(seasons) : long intervals between periods such that occupancy status can change</a:t>
             </a:r>
-            <a:endParaRPr lang="en-US" dirty="0"/>
           </a:p>
           <a:p>
             <a:pPr lvl="1" eaLnBrk="1" hangingPunct="1"/>
@@ -9383,7 +10926,6 @@
               <a:rPr lang="en-US" dirty="0"/>
               <a:t>: short intervals between periods such that occupancy status is expected not to change </a:t>
             </a:r>
-            <a:endParaRPr lang="en-US" dirty="0"/>
           </a:p>
           <a:p>
             <a:pPr lvl="1" eaLnBrk="1" hangingPunct="1"/>
@@ -9581,9 +11123,6 @@
               </a:rPr>
               <a:t>possible capture histories</a:t>
             </a:r>
-            <a:endParaRPr lang="en-US" sz="2000" dirty="0">
-              <a:sym typeface="Symbol" panose="05050102010706020507" pitchFamily="18" charset="2"/>
-            </a:endParaRPr>
           </a:p>
           <a:p>
             <a:pPr eaLnBrk="1" hangingPunct="1"/>
@@ -9593,9 +11132,6 @@
               </a:rPr>
               <a:t>History : 10 00 11 01</a:t>
             </a:r>
-            <a:endParaRPr lang="en-US" sz="2000" dirty="0">
-              <a:sym typeface="Symbol" panose="05050102010706020507" pitchFamily="18" charset="2"/>
-            </a:endParaRPr>
           </a:p>
           <a:p>
             <a:pPr eaLnBrk="1" hangingPunct="1"/>
@@ -9605,9 +11141,6 @@
               </a:rPr>
               <a:t>10 01 11 = presence in primary period 1, 3, &amp; 4</a:t>
             </a:r>
-            <a:endParaRPr lang="en-US" sz="2000" dirty="0">
-              <a:sym typeface="Symbol" panose="05050102010706020507" pitchFamily="18" charset="2"/>
-            </a:endParaRPr>
           </a:p>
           <a:p>
             <a:pPr eaLnBrk="1" hangingPunct="1"/>
@@ -9617,9 +11150,6 @@
               </a:rPr>
               <a:t>00 = </a:t>
             </a:r>
-            <a:endParaRPr lang="en-US" sz="2000" dirty="0">
-              <a:sym typeface="Symbol" panose="05050102010706020507" pitchFamily="18" charset="2"/>
-            </a:endParaRPr>
           </a:p>
           <a:p>
             <a:pPr lvl="1" eaLnBrk="1" hangingPunct="1"/>
@@ -9629,9 +11159,6 @@
               </a:rPr>
               <a:t>Patch occupied but occupancy not detected, or</a:t>
             </a:r>
-            <a:endParaRPr lang="en-US" sz="2000" dirty="0">
-              <a:sym typeface="Symbol" panose="05050102010706020507" pitchFamily="18" charset="2"/>
-            </a:endParaRPr>
           </a:p>
           <a:p>
             <a:pPr lvl="1" eaLnBrk="1" hangingPunct="1"/>
@@ -9641,9 +11168,6 @@
               </a:rPr>
               <a:t>Patch not occupied (=locally extinct) yet re-colonized later</a:t>
             </a:r>
-            <a:endParaRPr lang="en-US" sz="2000" dirty="0">
-              <a:sym typeface="Symbol" panose="05050102010706020507" pitchFamily="18" charset="2"/>
-            </a:endParaRPr>
           </a:p>
           <a:p>
             <a:pPr lvl="1" eaLnBrk="1" hangingPunct="1"/>
@@ -9685,9 +11209,6 @@
               </a:rPr>
               <a:t>可能的捕获历史</a:t>
             </a:r>
-            <a:endParaRPr lang="en-US" sz="2000" dirty="0">
-              <a:sym typeface="Symbol" panose="05050102010706020507" pitchFamily="18" charset="2"/>
-            </a:endParaRPr>
           </a:p>
           <a:p>
             <a:pPr eaLnBrk="1" hangingPunct="1"/>
@@ -9709,9 +11230,6 @@
               </a:rPr>
               <a:t>10 00 11 01</a:t>
             </a:r>
-            <a:endParaRPr lang="en-US" sz="2000" dirty="0">
-              <a:sym typeface="Symbol" panose="05050102010706020507" pitchFamily="18" charset="2"/>
-            </a:endParaRPr>
           </a:p>
           <a:p>
             <a:pPr eaLnBrk="1" hangingPunct="1"/>
@@ -9721,9 +11239,6 @@
               </a:rPr>
               <a:t>10 01 11 = 表示在主要时段1、3和4存在</a:t>
             </a:r>
-            <a:endParaRPr lang="en-US" sz="2000" dirty="0">
-              <a:sym typeface="Symbol" panose="05050102010706020507" pitchFamily="18" charset="2"/>
-            </a:endParaRPr>
           </a:p>
           <a:p>
             <a:pPr eaLnBrk="1" hangingPunct="1"/>
@@ -9733,9 +11248,6 @@
               </a:rPr>
               <a:t>00 = </a:t>
             </a:r>
-            <a:endParaRPr lang="en-US" sz="2000" dirty="0">
-              <a:sym typeface="Symbol" panose="05050102010706020507" pitchFamily="18" charset="2"/>
-            </a:endParaRPr>
           </a:p>
           <a:p>
             <a:pPr lvl="1" eaLnBrk="1" hangingPunct="1"/>
@@ -9749,89 +11261,77 @@
               <a:rPr lang="zh-CN" altLang="en-US" sz="2000" dirty="0">
                 <a:sym typeface="Symbol" panose="05050102010706020507" pitchFamily="18" charset="2"/>
               </a:rPr>
-              <a:t>地块</a:t>
+              <a:t>地块被占用</a:t>
+            </a:r>
+            <a:r>
+              <a:rPr lang="en-US" sz="2000" dirty="0">
+                <a:sym typeface="Symbol" panose="05050102010706020507" pitchFamily="18" charset="2"/>
+              </a:rPr>
+              <a:t>了，但未被检测到（即</a:t>
             </a:r>
             <a:r>
               <a:rPr lang="zh-CN" altLang="en-US" sz="2000" dirty="0">
                 <a:sym typeface="Symbol" panose="05050102010706020507" pitchFamily="18" charset="2"/>
               </a:rPr>
-              <a:t>被占用</a:t>
+              <a:t>占用</a:t>
             </a:r>
             <a:r>
               <a:rPr lang="en-US" sz="2000" dirty="0">
                 <a:sym typeface="Symbol" panose="05050102010706020507" pitchFamily="18" charset="2"/>
               </a:rPr>
-              <a:t>了，但未被检测到（即</a:t>
+              <a:t>状态未被观察到），或</a:t>
+            </a:r>
+          </a:p>
+          <a:p>
+            <a:pPr lvl="1" eaLnBrk="1" hangingPunct="1"/>
+            <a:r>
+              <a:rPr lang="en-US" sz="2000" dirty="0">
+                <a:sym typeface="Symbol" panose="05050102010706020507" pitchFamily="18" charset="2"/>
+              </a:rPr>
+              <a:t>也可以表示该</a:t>
             </a:r>
             <a:r>
               <a:rPr lang="zh-CN" altLang="en-US" sz="2000" dirty="0">
                 <a:sym typeface="Symbol" panose="05050102010706020507" pitchFamily="18" charset="2"/>
               </a:rPr>
-              <a:t>占用</a:t>
+              <a:t>地块</a:t>
             </a:r>
             <a:r>
               <a:rPr lang="en-US" sz="2000" dirty="0">
                 <a:sym typeface="Symbol" panose="05050102010706020507" pitchFamily="18" charset="2"/>
               </a:rPr>
-              <a:t>状态未被观察到），或</a:t>
-            </a:r>
-            <a:endParaRPr lang="en-US" sz="2000" dirty="0">
-              <a:sym typeface="Symbol" panose="05050102010706020507" pitchFamily="18" charset="2"/>
-            </a:endParaRPr>
-          </a:p>
-          <a:p>
-            <a:pPr lvl="1" eaLnBrk="1" hangingPunct="1"/>
+              <a:t>一开始未被</a:t>
+            </a:r>
+            <a:r>
+              <a:rPr lang="zh-CN" altLang="en-US" sz="2000" dirty="0">
+                <a:sym typeface="Symbol" panose="05050102010706020507" pitchFamily="18" charset="2"/>
+              </a:rPr>
+              <a:t>占用</a:t>
+            </a:r>
             <a:r>
               <a:rPr lang="en-US" sz="2000" dirty="0">
                 <a:sym typeface="Symbol" panose="05050102010706020507" pitchFamily="18" charset="2"/>
               </a:rPr>
-              <a:t>也可以表示该</a:t>
+              <a:t>（=局部灭绝），但后来</a:t>
             </a:r>
             <a:r>
               <a:rPr lang="zh-CN" altLang="en-US" sz="2000" dirty="0">
                 <a:sym typeface="Symbol" panose="05050102010706020507" pitchFamily="18" charset="2"/>
               </a:rPr>
-              <a:t>地块</a:t>
+              <a:t>又</a:t>
             </a:r>
             <a:r>
               <a:rPr lang="en-US" sz="2000" dirty="0">
                 <a:sym typeface="Symbol" panose="05050102010706020507" pitchFamily="18" charset="2"/>
               </a:rPr>
-              <a:t>一开始未被</a:t>
+              <a:t>重新被</a:t>
             </a:r>
             <a:r>
               <a:rPr lang="zh-CN" altLang="en-US" sz="2000" dirty="0">
                 <a:sym typeface="Symbol" panose="05050102010706020507" pitchFamily="18" charset="2"/>
               </a:rPr>
-              <a:t>占用</a:t>
-            </a:r>
-            <a:r>
-              <a:rPr lang="en-US" sz="2000" dirty="0">
-                <a:sym typeface="Symbol" panose="05050102010706020507" pitchFamily="18" charset="2"/>
-              </a:rPr>
-              <a:t>（=局部灭绝），但后来</a:t>
-            </a:r>
-            <a:r>
-              <a:rPr lang="zh-CN" altLang="en-US" sz="2000" dirty="0">
-                <a:sym typeface="Symbol" panose="05050102010706020507" pitchFamily="18" charset="2"/>
-              </a:rPr>
-              <a:t>又</a:t>
-            </a:r>
-            <a:r>
-              <a:rPr lang="en-US" sz="2000" dirty="0">
-                <a:sym typeface="Symbol" panose="05050102010706020507" pitchFamily="18" charset="2"/>
-              </a:rPr>
-              <a:t>重新被</a:t>
-            </a:r>
-            <a:r>
-              <a:rPr lang="zh-CN" altLang="en-US" sz="2000" dirty="0">
-                <a:sym typeface="Symbol" panose="05050102010706020507" pitchFamily="18" charset="2"/>
-              </a:rPr>
               <a:t>定居</a:t>
             </a:r>
-            <a:endParaRPr lang="zh-CN" altLang="en-US" sz="2000" dirty="0">
-              <a:sym typeface="Symbol" panose="05050102010706020507" pitchFamily="18" charset="2"/>
-            </a:endParaRPr>
           </a:p>
         </p:txBody>
       </p:sp>
@@ -9870,7 +11370,6 @@
               <a:rPr lang="en-US" dirty="0"/>
               <a:t> </a:t>
             </a:r>
-            <a:endParaRPr lang="en-US" dirty="0"/>
           </a:p>
         </p:txBody>
       </p:sp>
@@ -9925,13 +11424,8 @@
             </a:br>
             <a:r>
               <a:rPr lang="zh-CN" altLang="en-US" dirty="0"/>
-              <a:t>占用</a:t>
-            </a:r>
-            <a:r>
-              <a:rPr lang="zh-CN" altLang="en-US" dirty="0"/>
-              <a:t>动态</a:t>
-            </a:r>
-            <a:endParaRPr lang="zh-CN" altLang="en-US" dirty="0"/>
+              <a:t>占用动态</a:t>
+            </a:r>
           </a:p>
         </p:txBody>
       </p:sp>
@@ -9984,7 +11478,6 @@
               <a:rPr lang="en-US" dirty="0"/>
               <a:t>0 - unoccupied</a:t>
             </a:r>
-            <a:endParaRPr lang="en-US" dirty="0"/>
           </a:p>
           <a:p>
             <a:pPr marL="0" marR="0" indent="0" algn="ctr" defTabSz="914400" rtl="0" eaLnBrk="0" fontAlgn="base" latinLnBrk="0" hangingPunct="0">
@@ -10028,16 +11521,6 @@
               </a:rPr>
               <a:t>未占用</a:t>
             </a:r>
-            <a:endParaRPr kumimoji="0" lang="zh-CN" altLang="en-US" sz="1800" b="0" i="0" u="none" strike="noStrike" cap="none" normalizeH="0" baseline="0" dirty="0">
-              <a:ln>
-                <a:noFill/>
-              </a:ln>
-              <a:solidFill>
-                <a:schemeClr val="tx1"/>
-              </a:solidFill>
-              <a:effectLst/>
-              <a:latin typeface="Tahoma" panose="020B0604030504040204" pitchFamily="34" charset="0"/>
-            </a:endParaRPr>
           </a:p>
         </p:txBody>
       </p:sp>
@@ -10124,7 +11607,6 @@
               <a:rPr lang="en-US" dirty="0"/>
               <a:t>1 - occupied</a:t>
             </a:r>
-            <a:endParaRPr lang="en-US" dirty="0"/>
           </a:p>
           <a:p>
             <a:pPr marL="0" marR="0" indent="0" algn="ctr" defTabSz="914400" rtl="0" eaLnBrk="0" fontAlgn="base" latinLnBrk="0" hangingPunct="0">
@@ -10168,16 +11650,6 @@
               </a:rPr>
               <a:t>已占用</a:t>
             </a:r>
-            <a:endParaRPr kumimoji="0" lang="zh-CN" altLang="en-US" sz="1800" b="0" i="0" u="none" strike="noStrike" cap="none" normalizeH="0" baseline="0" dirty="0">
-              <a:ln>
-                <a:noFill/>
-              </a:ln>
-              <a:solidFill>
-                <a:schemeClr val="tx1"/>
-              </a:solidFill>
-              <a:effectLst/>
-              <a:latin typeface="Tahoma" panose="020B0604030504040204" pitchFamily="34" charset="0"/>
-            </a:endParaRPr>
           </a:p>
         </p:txBody>
       </p:sp>
@@ -10230,7 +11702,6 @@
               <a:rPr lang="en-US" dirty="0"/>
               <a:t>0 - unoccupied</a:t>
             </a:r>
-            <a:endParaRPr lang="en-US" dirty="0"/>
           </a:p>
           <a:p>
             <a:pPr marL="0" marR="0" indent="0" algn="ctr" defTabSz="914400" rtl="0" eaLnBrk="0" fontAlgn="base" latinLnBrk="0" hangingPunct="0">
@@ -10337,7 +11808,6 @@
               <a:rPr lang="en-US" dirty="0"/>
               <a:t>1 - occupied</a:t>
             </a:r>
-            <a:endParaRPr lang="en-US" dirty="0"/>
           </a:p>
           <a:p>
             <a:pPr marL="0" marR="0" indent="0" algn="ctr" defTabSz="914400" rtl="0" eaLnBrk="0" fontAlgn="base" latinLnBrk="0" hangingPunct="0">
@@ -10439,7 +11909,6 @@
               <a:rPr lang="en-US" dirty="0"/>
               <a:t>0 - unoccupied</a:t>
             </a:r>
-            <a:endParaRPr lang="en-US" dirty="0"/>
           </a:p>
           <a:p>
             <a:pPr marL="0" marR="0" indent="0" algn="ctr" defTabSz="914400" rtl="0" eaLnBrk="0" fontAlgn="base" latinLnBrk="0" hangingPunct="0">
@@ -10546,7 +12015,6 @@
               <a:rPr lang="en-US" dirty="0"/>
               <a:t>1 - occupied</a:t>
             </a:r>
-            <a:endParaRPr lang="en-US" dirty="0"/>
           </a:p>
           <a:p>
             <a:pPr marL="0" marR="0" indent="0" algn="ctr" defTabSz="914400" rtl="0" eaLnBrk="0" fontAlgn="base" latinLnBrk="0" hangingPunct="0">
@@ -10883,14 +12351,12 @@
               <a:rPr lang="en-US" dirty="0"/>
               <a:t>season</a:t>
             </a:r>
-            <a:endParaRPr lang="en-US" dirty="0"/>
           </a:p>
           <a:p>
             <a:r>
               <a:rPr lang="zh-CN" altLang="en-US" dirty="0"/>
               <a:t>季节</a:t>
             </a:r>
-            <a:endParaRPr lang="zh-CN" altLang="en-US" dirty="0"/>
           </a:p>
         </p:txBody>
       </p:sp>
@@ -10929,13 +12395,8 @@
             </a:r>
             <a:r>
               <a:rPr lang="zh-CN" altLang="en-US" dirty="0"/>
-              <a:t>占用</a:t>
-            </a:r>
-            <a:r>
-              <a:rPr lang="zh-CN" altLang="en-US" dirty="0"/>
-              <a:t>状态</a:t>
-            </a:r>
-            <a:endParaRPr lang="zh-CN" altLang="en-US" dirty="0"/>
+              <a:t>占用状态</a:t>
+            </a:r>
           </a:p>
         </p:txBody>
       </p:sp>
@@ -11290,7 +12751,6 @@
               <a:rPr lang="en-US" sz="2400" dirty="0"/>
               <a:t> – not colonized</a:t>
             </a:r>
-            <a:endParaRPr lang="en-US" sz="2400" dirty="0"/>
           </a:p>
           <a:p>
             <a:pPr marL="0" marR="0" indent="0" algn="ctr" defTabSz="914400" rtl="0" eaLnBrk="0" fontAlgn="base" latinLnBrk="0" hangingPunct="0">
@@ -11325,17 +12785,8 @@
               <a:rPr lang="zh-CN" altLang="en-US" sz="2400" dirty="0">
                 <a:sym typeface="+mn-ea"/>
               </a:rPr>
-              <a:t>未被重新</a:t>
-            </a:r>
-            <a:r>
-              <a:rPr lang="zh-CN" altLang="en-US" sz="2400" dirty="0">
-                <a:sym typeface="+mn-ea"/>
-              </a:rPr>
-              <a:t>定居</a:t>
-            </a:r>
-            <a:endParaRPr lang="zh-CN" altLang="en-US" sz="2400" dirty="0">
-              <a:sym typeface="+mn-ea"/>
-            </a:endParaRPr>
+              <a:t>未被重新定居</a:t>
+            </a:r>
           </a:p>
         </p:txBody>
       </p:sp>
@@ -12732,7 +14183,6 @@
               <a:rPr lang="en-US" dirty="0"/>
               <a:t>season</a:t>
             </a:r>
-            <a:endParaRPr lang="en-US" dirty="0"/>
           </a:p>
         </p:txBody>
       </p:sp>
@@ -12771,13 +14221,8 @@
             </a:r>
             <a:r>
               <a:rPr lang="zh-CN" altLang="en-US" dirty="0"/>
-              <a:t>占用</a:t>
-            </a:r>
-            <a:r>
-              <a:rPr lang="zh-CN" altLang="en-US" dirty="0"/>
-              <a:t>状态</a:t>
-            </a:r>
-            <a:endParaRPr lang="zh-CN" altLang="en-US" dirty="0"/>
+              <a:t>占用状态</a:t>
+            </a:r>
           </a:p>
         </p:txBody>
       </p:sp>
@@ -12911,7 +14356,6 @@
               <a:rPr lang="en-US" sz="2400" dirty="0"/>
               <a:t>)</a:t>
             </a:r>
-            <a:endParaRPr lang="en-US" sz="2400" dirty="0"/>
           </a:p>
           <a:p>
             <a:pPr marL="0" marR="0" indent="0" algn="ctr" defTabSz="914400" rtl="0" eaLnBrk="0" fontAlgn="base" latinLnBrk="0" hangingPunct="0">
@@ -12959,7 +14403,6 @@
               <a:rPr lang="zh-CN" altLang="en-US" sz="2400" dirty="0"/>
               <a:t>收缩</a:t>
             </a:r>
-            <a:endParaRPr lang="zh-CN" altLang="en-US" sz="2400" dirty="0"/>
           </a:p>
         </p:txBody>
       </p:sp>
@@ -12992,13 +14435,8 @@
             </a:br>
             <a:r>
               <a:rPr lang="zh-CN" altLang="en-US" dirty="0"/>
-              <a:t>占用</a:t>
-            </a:r>
-            <a:r>
-              <a:rPr lang="zh-CN" altLang="en-US" dirty="0"/>
-              <a:t>动态</a:t>
-            </a:r>
-            <a:endParaRPr lang="zh-CN" altLang="en-US" dirty="0"/>
+              <a:t>占用动态</a:t>
+            </a:r>
           </a:p>
         </p:txBody>
       </p:sp>
@@ -13055,7 +14493,6 @@
               <a:rPr lang="zh-CN" altLang="en-US" dirty="0"/>
               <a:t>推断种群动态！</a:t>
             </a:r>
-            <a:endParaRPr lang="zh-CN" altLang="en-US" dirty="0"/>
           </a:p>
         </p:txBody>
       </p:sp>
@@ -13078,14 +14515,12 @@
               <a:rPr lang="en-US" dirty="0"/>
               <a:t>Evaluate probability of extinction and colonization</a:t>
             </a:r>
-            <a:endParaRPr lang="en-US" dirty="0"/>
           </a:p>
           <a:p>
             <a:r>
               <a:rPr lang="en-US" dirty="0"/>
               <a:t>评估灭绝和重新定居的概率</a:t>
             </a:r>
-            <a:endParaRPr lang="en-US" dirty="0"/>
           </a:p>
           <a:p>
             <a:endParaRPr lang="en-US" dirty="0"/>
@@ -13140,7 +14575,6 @@
               <a:rPr lang="en-US" sz="3200" b="1" dirty="0"/>
               <a:t>)</a:t>
             </a:r>
-            <a:endParaRPr lang="en-US" sz="3200" b="1" dirty="0"/>
           </a:p>
           <a:p>
             <a:pPr algn="ctr" defTabSz="914400" eaLnBrk="0" fontAlgn="base" hangingPunct="0">
@@ -13155,7 +14589,6 @@
               <a:rPr lang="en-US" sz="3200" dirty="0"/>
               <a:t>&gt;1.0 – population expansion (increase)</a:t>
             </a:r>
-            <a:endParaRPr lang="en-US" sz="3200" dirty="0"/>
           </a:p>
           <a:p>
             <a:pPr algn="ctr" defTabSz="914400" eaLnBrk="0" fontAlgn="base" hangingPunct="0">
@@ -13170,7 +14603,6 @@
               <a:rPr lang="en-US" sz="3200" dirty="0"/>
               <a:t>&lt;1.0 – population contraction (decrease)</a:t>
             </a:r>
-            <a:endParaRPr lang="en-US" sz="3200" dirty="0"/>
           </a:p>
           <a:p>
             <a:pPr algn="ctr" defTabSz="914400" eaLnBrk="0" fontAlgn="base" hangingPunct="0">
@@ -13185,7 +14617,6 @@
               <a:rPr lang="en-US" sz="3200" dirty="0"/>
               <a:t>λ-动态 (g/e)：</a:t>
             </a:r>
-            <a:endParaRPr lang="en-US" sz="3200" dirty="0"/>
           </a:p>
           <a:p>
             <a:pPr algn="ctr" defTabSz="914400" eaLnBrk="0" fontAlgn="base" hangingPunct="0">
@@ -13200,7 +14631,6 @@
               <a:rPr lang="en-US" sz="3200" dirty="0"/>
               <a:t>&gt;1.0—种群扩张（增加）</a:t>
             </a:r>
-            <a:endParaRPr lang="en-US" sz="3200" dirty="0"/>
           </a:p>
           <a:p>
             <a:pPr algn="ctr" defTabSz="914400" eaLnBrk="0" fontAlgn="base" hangingPunct="0">
@@ -13215,7 +14645,6 @@
               <a:rPr lang="en-US" sz="3200" dirty="0"/>
               <a:t>&lt;1.0—种群收缩（减少）</a:t>
             </a:r>
-            <a:endParaRPr lang="en-US" sz="3200" dirty="0"/>
           </a:p>
         </p:txBody>
       </p:sp>
@@ -13228,14 +14657,14 @@
 </file>
 
 <file path=ppt/tags/tag1.xml><?xml version="1.0" encoding="utf-8"?>
-<p:tagLst xmlns:p="http://schemas.openxmlformats.org/presentationml/2006/main">
-  <p:tag name="KSO_WM_BEAUTIFY_FLAG" val=""/>
+<p:tagLst xmlns:a="http://schemas.openxmlformats.org/drawingml/2006/main" xmlns:r="http://schemas.openxmlformats.org/officeDocument/2006/relationships" xmlns:p="http://schemas.openxmlformats.org/presentationml/2006/main">
+  <p:tag name="COMMONDATA" val="eyJoZGlkIjoiM2MwZTM1NDgyZTEzMGYwNDQyOTIwZWQ0YmNlZDc4ZDAifQ=="/>
 </p:tagLst>
 </file>
 
 <file path=ppt/tags/tag2.xml><?xml version="1.0" encoding="utf-8"?>
-<p:tagLst xmlns:p="http://schemas.openxmlformats.org/presentationml/2006/main">
-  <p:tag name="commondata" val="eyJoZGlkIjoiM2MwZTM1NDgyZTEzMGYwNDQyOTIwZWQ0YmNlZDc4ZDAifQ=="/>
+<p:tagLst xmlns:a="http://schemas.openxmlformats.org/drawingml/2006/main" xmlns:r="http://schemas.openxmlformats.org/officeDocument/2006/relationships" xmlns:p="http://schemas.openxmlformats.org/presentationml/2006/main">
+  <p:tag name="KSO_WM_BEAUTIFY_FLAG" val=""/>
 </p:tagLst>
 </file>
 
@@ -13555,6 +14984,7 @@
       </a:style>
     </a:lnDef>
   </a:objectDefaults>
+  <a:extraClrSchemeLst/>
   <a:extLst>
     <a:ext uri="{05A4C25C-085E-4340-85A3-A5531E510DB2}">
       <thm15:themeFamily xmlns:thm15="http://schemas.microsoft.com/office/thememl/2012/main" name="Office Theme" id="{62F939B6-93AF-4DB8-9C6B-D6C7DFDC589F}" vid="{4A3C46E8-61CC-4603-A589-7422A47A8E4A}"/>
@@ -13879,6 +15309,7 @@
       </a:style>
     </a:lnDef>
   </a:objectDefaults>
+  <a:extraClrSchemeLst/>
   <a:extLst>
     <a:ext uri="{05A4C25C-085E-4340-85A3-A5531E510DB2}">
       <thm15:themeFamily xmlns:thm15="http://schemas.microsoft.com/office/thememl/2012/main" name="Office Theme" id="{62F939B6-93AF-4DB8-9C6B-D6C7DFDC589F}" vid="{4A3C46E8-61CC-4603-A589-7422A47A8E4A}"/>
@@ -14203,6 +15634,7 @@
       </a:style>
     </a:lnDef>
   </a:objectDefaults>
+  <a:extraClrSchemeLst/>
   <a:extLst>
     <a:ext uri="{05A4C25C-085E-4340-85A3-A5531E510DB2}">
       <thm15:themeFamily xmlns:thm15="http://schemas.microsoft.com/office/thememl/2012/main" name="Office Theme" id="{62F939B6-93AF-4DB8-9C6B-D6C7DFDC589F}" vid="{4A3C46E8-61CC-4603-A589-7422A47A8E4A}"/>
